--- a/public/templates/000_pm_suite/01_프로젝트 관리/01_통합관리/진도_관리_계획서_템플릿.pptx
+++ b/public/templates/000_pm_suite/01_프로젝트 관리/01_통합관리/진도_관리_계획서_템플릿.pptx
@@ -3265,7 +3265,7 @@
                 </a:solidFill>
                 <a:latin typeface="맑은 고딕"/>
               </a:rPr>
-              <a:t>산출물 ID : GRV_MAN_090   |   버전 : v1.0   |   표준 관리 템플릿</a:t>
+              <a:t>산출물 ID : EMP_MAN_090   |   버전 : v1.0   |   표준 관리 템플릿</a:t>
             </a:r>
           </a:p>
         </p:txBody>
@@ -3350,7 +3350,7 @@
                 </a:solidFill>
                 <a:latin typeface="맑은 고딕"/>
               </a:rPr>
-              <a:t>아모레퍼시픽 Claimworks-Claims AI 시스템 구축</a:t>
+              <a:t>한빛글로벌 SyncGuard AI 시스템 구축</a:t>
             </a:r>
           </a:p>
         </p:txBody>
@@ -3574,7 +3574,7 @@
                           </a:solidFill>
                           <a:latin typeface="맑은 고딕"/>
                         </a:rPr>
-                        <a:t>아모레퍼시픽 Claimworks-Claims AI 시스템 구축 용역</a:t>
+                        <a:t>한빛글로벌 SyncGuard AI 시스템 구축 용역</a:t>
                       </a:r>
                     </a:p>
                   </a:txBody>
@@ -3778,7 +3778,7 @@
                           </a:solidFill>
                           <a:latin typeface="맑은 고딕"/>
                         </a:rPr>
-                        <a:t>주식회사 아모레퍼시픽 (연구전략Lab / ERP플랫폼기획팀 / RA Lab)</a:t>
+                        <a:t>주식회사 한빛글로벌 (연구전략Lab / ERP플랫폼기획팀 / RA Lab)</a:t>
                       </a:r>
                     </a:p>
                   </a:txBody>
@@ -3880,7 +3880,7 @@
                           </a:solidFill>
                           <a:latin typeface="맑은 고딕"/>
                         </a:rPr>
-                        <a:t>주식회사 그로브소프트 (협력사: ㈜아이시프트)</a:t>
+                        <a:t>주식회사 엠파시 (협력사: ㈜데이터브릿지)</a:t>
                       </a:r>
                     </a:p>
                   </a:txBody>
@@ -4153,7 +4153,7 @@
                           </a:solidFill>
                           <a:latin typeface="맑은 고딕"/>
                         </a:rPr>
-                        <a:t>수행사 (그로브)</a:t>
+                        <a:t>수행사 (엠파시)</a:t>
                       </a:r>
                     </a:p>
                   </a:txBody>
@@ -4203,7 +4203,7 @@
                           </a:solidFill>
                           <a:latin typeface="맑은 고딕"/>
                         </a:rPr>
-                        <a:t>발주사 (아모레)</a:t>
+                        <a:t>발주사 (한빛글로벌)</a:t>
                       </a:r>
                     </a:p>
                   </a:txBody>
@@ -4305,7 +4305,7 @@
                           </a:solidFill>
                           <a:latin typeface="맑은 고딕"/>
                         </a:rPr>
-                        <a:t>김재은 PM</a:t>
+                        <a:t>김태윤 PM</a:t>
                       </a:r>
                     </a:p>
                   </a:txBody>
@@ -4355,7 +4355,7 @@
                           </a:solidFill>
                           <a:latin typeface="맑은 고딕"/>
                         </a:rPr>
-                        <a:t>박주열 PM</a:t>
+                        <a:t>정민수 PM</a:t>
                       </a:r>
                     </a:p>
                   </a:txBody>
@@ -4457,7 +4457,7 @@
                           </a:solidFill>
                           <a:latin typeface="맑은 고딕"/>
                         </a:rPr>
-                        <a:t>오병문 AA</a:t>
+                        <a:t>박준혁 AA</a:t>
                       </a:r>
                     </a:p>
                   </a:txBody>
@@ -4507,7 +4507,7 @@
                           </a:solidFill>
                           <a:latin typeface="맑은 고딕"/>
                         </a:rPr>
-                        <a:t>김경호 PM</a:t>
+                        <a:t>한승우 PM</a:t>
                       </a:r>
                     </a:p>
                   </a:txBody>
@@ -4913,7 +4913,7 @@
                 </a:solidFill>
                 <a:latin typeface="맑은 고딕"/>
               </a:rPr>
-              <a:t>• 본 문서는 전사 표준 프로젝트 관리 템플릿이자 아모레퍼시픽 Claim AI 실전 기준서입니다.</a:t>
+              <a:t>• 본 문서는 전사 표준 프로젝트 관리 템플릿이자 한빛글로벌 SyncGuard AI 실전 기준서입니다.</a:t>
             </a:r>
           </a:p>
           <a:p>
@@ -5053,7 +5053,7 @@
                 </a:solidFill>
                 <a:latin typeface="맑은 고딕"/>
               </a:rPr>
-              <a:t>산출물 ID : GRV_MAN_090  |  버전 : v1.0</a:t>
+              <a:t>산출물 ID : EMP_MAN_090  |  버전 : v1.0</a:t>
             </a:r>
           </a:p>
         </p:txBody>
@@ -5265,7 +5265,7 @@
                 </a:solidFill>
                 <a:latin typeface="맑은 고딕"/>
               </a:rPr>
-              <a:t>아모레퍼시픽 Claimworks-Claims AI 시스템 구축  |  진도 관리 계획서</a:t>
+              <a:t>한빛글로벌 SyncGuard AI 시스템 구축  |  진도 관리 계획서</a:t>
             </a:r>
           </a:p>
         </p:txBody>
@@ -5349,7 +5349,7 @@
                 </a:solidFill>
                 <a:latin typeface="맑은 고딕"/>
               </a:rPr>
-              <a:t>발주사 : AMOREPACIFIC   |   수행사 : ㈜그로브소프트 (GROVE)</a:t>
+              <a:t>발주사 : HANBIT GLOBAL   |   수행사 : ㈜엠파시 (Empasy Inc.)</a:t>
             </a:r>
           </a:p>
         </p:txBody>
@@ -5619,7 +5619,7 @@
                           </a:solidFill>
                           <a:latin typeface="맑은 고딕"/>
                         </a:rPr>
-                        <a:t>• 담당 파트 / 담당자 : AI 엔지니어 파트 / 홍길동 선임</a:t>
+                        <a:t>• 담당 파트 / 담당자 : AI 엔지니어 파트 / 박진우 수석 선임</a:t>
                       </a:r>
                     </a:p>
                   </a:txBody>
@@ -5669,7 +5669,7 @@
                           </a:solidFill>
                           <a:latin typeface="맑은 고딕"/>
                         </a:rPr>
-                        <a:t>WBS (GRV_INT_020)</a:t>
+                        <a:t>WBS (EMP_INT_020)</a:t>
                       </a:r>
                     </a:p>
                   </a:txBody>
@@ -5840,7 +5840,7 @@
                           </a:solidFill>
                           <a:latin typeface="맑은 고딕"/>
                         </a:rPr>
-                        <a:t>주간보고 (GRV_MAN_010)</a:t>
+                        <a:t>주간보고 (EMP_MAN_010)</a:t>
                       </a:r>
                     </a:p>
                   </a:txBody>
@@ -6030,7 +6030,7 @@
                           </a:solidFill>
                           <a:latin typeface="맑은 고딕"/>
                         </a:rPr>
-                        <a:t>이슈대장 (GRV_MAN_030)</a:t>
+                        <a:t>이슈대장 (EMP_MAN_030)</a:t>
                       </a:r>
                     </a:p>
                     <a:p>
@@ -6410,7 +6410,7 @@
                           </a:solidFill>
                           <a:latin typeface="맑은 고딕"/>
                         </a:rPr>
-                        <a:t>투입공수 (GRV_MAN_050)</a:t>
+                        <a:t>투입공수 (EMP_MAN_050)</a:t>
                       </a:r>
                     </a:p>
                     <a:p>
@@ -6900,7 +6900,7 @@
                 </a:solidFill>
                 <a:latin typeface="맑은 고딕"/>
               </a:rPr>
-              <a:t>산출물 ID : GRV_MAN_090  |  버전 : v1.0</a:t>
+              <a:t>산출물 ID : EMP_MAN_090  |  버전 : v1.0</a:t>
             </a:r>
           </a:p>
         </p:txBody>
@@ -7112,7 +7112,7 @@
                 </a:solidFill>
                 <a:latin typeface="맑은 고딕"/>
               </a:rPr>
-              <a:t>아모레퍼시픽 Claimworks-Claims AI 시스템 구축  |  진도 관리 계획서</a:t>
+              <a:t>한빛글로벌 SyncGuard AI 시스템 구축  |  진도 관리 계획서</a:t>
             </a:r>
           </a:p>
         </p:txBody>
@@ -7196,7 +7196,7 @@
                 </a:solidFill>
                 <a:latin typeface="맑은 고딕"/>
               </a:rPr>
-              <a:t>발주사 : AMOREPACIFIC   |   수행사 : ㈜그로브소프트 (GROVE)</a:t>
+              <a:t>발주사 : HANBIT GLOBAL   |   수행사 : ㈜엠파시 (Empasy Inc.)</a:t>
             </a:r>
           </a:p>
         </p:txBody>
@@ -7691,7 +7691,7 @@
                           </a:solidFill>
                           <a:latin typeface="맑은 고딕"/>
                         </a:rPr>
-                        <a:t>공공 SW사업 진도관리 지침 및 WBS(GRV_INT_020) 기준 진도관리 계획 수립</a:t>
+                        <a:t>공공 SW사업 진도관리 지침 및 WBS(EMP_INT_020) 기준 진도관리 계획 수립</a:t>
                       </a:r>
                     </a:p>
                   </a:txBody>
@@ -7741,7 +7741,7 @@
                           </a:solidFill>
                           <a:latin typeface="맑은 고딕"/>
                         </a:rPr>
-                        <a:t>김재은 PM</a:t>
+                        <a:t>김태윤 PM</a:t>
                       </a:r>
                     </a:p>
                   </a:txBody>
@@ -7993,7 +7993,7 @@
                           </a:solidFill>
                           <a:latin typeface="맑은 고딕"/>
                         </a:rPr>
-                        <a:t>김재은 / 박주열</a:t>
+                        <a:t>김태윤 / 정민수</a:t>
                       </a:r>
                     </a:p>
                   </a:txBody>
@@ -8245,7 +8245,7 @@
                           </a:solidFill>
                           <a:latin typeface="맑은 고딕"/>
                         </a:rPr>
-                        <a:t>황자영 PMO</a:t>
+                        <a:t>이지훈 PMO</a:t>
                       </a:r>
                     </a:p>
                   </a:txBody>
@@ -8537,7 +8537,7 @@
                 </a:solidFill>
                 <a:latin typeface="맑은 고딕"/>
               </a:rPr>
-              <a:t>3. 교체 필수 항목 : [사업명], [발주사/수행사 조직], [사업기간 및 M1~M6 일정], [산출물 ID 체계], [인력/인프라 수량]</a:t>
+              <a:t>3. 교체 필수 항목 : SyncGuard AI 시스템 구축 사업, [발주사/수행사 조직], [사업기간 및 M1~M6 일정], [산출물 ID 체계], [인력/인프라 수량]</a:t>
             </a:r>
           </a:p>
           <a:p>
@@ -8556,7 +8556,7 @@
                 </a:solidFill>
                 <a:latin typeface="맑은 고딕"/>
               </a:rPr>
-              <a:t>4. 연계 문서 : 사업수행계획서(GRV_INT_010), WBS(GRV_INT_020), 주간보고서(GRV_MAN_010), 투입공수(GRV_MAN_050)</a:t>
+              <a:t>4. 연계 문서 : 사업수행계획서(EMP_INT_010), WBS(EMP_INT_020), 주간보고서(EMP_MAN_010), 투입공수(EMP_MAN_050)</a:t>
             </a:r>
           </a:p>
         </p:txBody>
@@ -10748,7 +10748,7 @@
                 </a:solidFill>
                 <a:latin typeface="맑은 고딕"/>
               </a:rPr>
-              <a:t>산출물 ID : GRV_MAN_090  |  버전 : v1.0</a:t>
+              <a:t>산출물 ID : EMP_MAN_090  |  버전 : v1.0</a:t>
             </a:r>
           </a:p>
         </p:txBody>
@@ -10960,7 +10960,7 @@
                 </a:solidFill>
                 <a:latin typeface="맑은 고딕"/>
               </a:rPr>
-              <a:t>아모레퍼시픽 Claimworks-Claims AI 시스템 구축  |  진도 관리 계획서</a:t>
+              <a:t>한빛글로벌 SyncGuard AI 시스템 구축  |  진도 관리 계획서</a:t>
             </a:r>
           </a:p>
         </p:txBody>
@@ -11044,7 +11044,7 @@
                 </a:solidFill>
                 <a:latin typeface="맑은 고딕"/>
               </a:rPr>
-              <a:t>발주사 : AMOREPACIFIC   |   수행사 : ㈜그로브소프트 (GROVE)</a:t>
+              <a:t>발주사 : HANBIT GLOBAL   |   수행사 : ㈜엠파시 (Empasy Inc.)</a:t>
             </a:r>
           </a:p>
         </p:txBody>
@@ -11268,7 +11268,7 @@
                 </a:solidFill>
                 <a:latin typeface="맑은 고딕"/>
               </a:rPr>
-              <a:t>• 작업분할구조도 WBS(GRV_INT_020)의 계획/실적 진도율을 주간업무보고서(GRV_MAN_010)에 매주 금요일 1:1 자동 반영</a:t>
+              <a:t>• 작업분할구조도 WBS(EMP_INT_020)의 계획/실적 진도율을 주간업무보고서(EMP_MAN_010)에 매주 금요일 1:1 자동 반영</a:t>
             </a:r>
           </a:p>
           <a:p>
@@ -11287,7 +11287,7 @@
                 </a:solidFill>
                 <a:latin typeface="맑은 고딕"/>
               </a:rPr>
-              <a:t>• 월별투입공수 관리대장(GRV_MAN_050)의 실제 투입 M/M와 공정 진행률을 교차 대조하여 생산성 편차 분석</a:t>
+              <a:t>• 월별투입공수 관리대장(EMP_MAN_050)의 실제 투입 M/M와 공정 진행률을 교차 대조하여 생산성 편차 분석</a:t>
             </a:r>
           </a:p>
           <a:p>
@@ -11792,7 +11792,7 @@
                 </a:solidFill>
                 <a:latin typeface="맑은 고딕"/>
               </a:rPr>
-              <a:t>• 3단계 AI 판정 엔진(규칙+RAG+LLM), myBeaker 실증DB 연계, 사내 SSO/Tiumnet 방화벽 개통을 핵심 임계 경로로 지정</a:t>
+              <a:t>• 3단계 AI 판정 엔진(규칙+RAG+LLM), ProductLab 실증DB 연계, 사내 SSO/MarketingHub 방화벽 개통을 핵심 임계 경로로 지정</a:t>
             </a:r>
           </a:p>
           <a:p>
@@ -12324,7 +12324,7 @@
                 </a:solidFill>
                 <a:latin typeface="맑은 고딕"/>
               </a:rPr>
-              <a:t>산출물 ID : GRV_MAN_090  |  버전 : v1.0</a:t>
+              <a:t>산출물 ID : EMP_MAN_090  |  버전 : v1.0</a:t>
             </a:r>
           </a:p>
         </p:txBody>
@@ -12536,7 +12536,7 @@
                 </a:solidFill>
                 <a:latin typeface="맑은 고딕"/>
               </a:rPr>
-              <a:t>아모레퍼시픽 Claimworks-Claims AI 시스템 구축  |  진도 관리 계획서</a:t>
+              <a:t>한빛글로벌 SyncGuard AI 시스템 구축  |  진도 관리 계획서</a:t>
             </a:r>
           </a:p>
         </p:txBody>
@@ -12620,7 +12620,7 @@
                 </a:solidFill>
                 <a:latin typeface="맑은 고딕"/>
               </a:rPr>
-              <a:t>발주사 : AMOREPACIFIC   |   수행사 : ㈜그로브소프트 (GROVE)</a:t>
+              <a:t>발주사 : HANBIT GLOBAL   |   수행사 : ㈜엠파시 (Empasy Inc.)</a:t>
             </a:r>
           </a:p>
         </p:txBody>
@@ -14086,7 +14086,7 @@
                           </a:solidFill>
                           <a:latin typeface="맑은 고딕"/>
                         </a:rPr>
-                        <a:t>3단계 AI 엔진, 100대 규칙사전, Side-by-Side 뷰어, myBeaker 실증DB 및 SSO/Tiumnet 연계</a:t>
+                        <a:t>3단계 AI 엔진, 100대 규칙사전, Side-by-Side 뷰어, ProductLab 실증DB 및 SSO/MarketingHub 연계</a:t>
                       </a:r>
                     </a:p>
                   </a:txBody>
@@ -15587,7 +15587,7 @@
                 </a:solidFill>
                 <a:latin typeface="맑은 고딕"/>
               </a:rPr>
-              <a:t>myBeaker 실증자료 DB 연동</a:t>
+              <a:t>ProductLab 실증자료 DB 연동</a:t>
             </a:r>
           </a:p>
         </p:txBody>
@@ -16418,7 +16418,7 @@
                 </a:solidFill>
                 <a:latin typeface="맑은 고딕"/>
               </a:rPr>
-              <a:t>산출물 ID : GRV_MAN_090  |  버전 : v1.0</a:t>
+              <a:t>산출물 ID : EMP_MAN_090  |  버전 : v1.0</a:t>
             </a:r>
           </a:p>
         </p:txBody>
@@ -16630,7 +16630,7 @@
                 </a:solidFill>
                 <a:latin typeface="맑은 고딕"/>
               </a:rPr>
-              <a:t>아모레퍼시픽 Claimworks-Claims AI 시스템 구축  |  진도 관리 계획서</a:t>
+              <a:t>한빛글로벌 SyncGuard AI 시스템 구축  |  진도 관리 계획서</a:t>
             </a:r>
           </a:p>
         </p:txBody>
@@ -16714,7 +16714,7 @@
                 </a:solidFill>
                 <a:latin typeface="맑은 고딕"/>
               </a:rPr>
-              <a:t>발주사 : AMOREPACIFIC   |   수행사 : ㈜그로브소프트 (GROVE)</a:t>
+              <a:t>발주사 : HANBIT GLOBAL   |   수행사 : ㈜엠파시 (Empasy Inc.)</a:t>
             </a:r>
           </a:p>
         </p:txBody>
@@ -17888,7 +17888,7 @@
                 </a:solidFill>
                 <a:latin typeface="맑은 고딕"/>
               </a:rPr>
-              <a:t>산출물 ID : GRV_MAN_090  |  버전 : v1.0</a:t>
+              <a:t>산출물 ID : EMP_MAN_090  |  버전 : v1.0</a:t>
             </a:r>
           </a:p>
         </p:txBody>
@@ -18100,7 +18100,7 @@
                 </a:solidFill>
                 <a:latin typeface="맑은 고딕"/>
               </a:rPr>
-              <a:t>아모레퍼시픽 Claimworks-Claims AI 시스템 구축  |  진도 관리 계획서</a:t>
+              <a:t>한빛글로벌 SyncGuard AI 시스템 구축  |  진도 관리 계획서</a:t>
             </a:r>
           </a:p>
         </p:txBody>
@@ -18184,7 +18184,7 @@
                 </a:solidFill>
                 <a:latin typeface="맑은 고딕"/>
               </a:rPr>
-              <a:t>발주사 : AMOREPACIFIC   |   수행사 : ㈜그로브소프트 (GROVE)</a:t>
+              <a:t>발주사 : HANBIT GLOBAL   |   수행사 : ㈜엠파시 (Empasy Inc.)</a:t>
             </a:r>
           </a:p>
         </p:txBody>
@@ -22581,7 +22581,7 @@
                 </a:solidFill>
                 <a:latin typeface="맑은 고딕"/>
               </a:rPr>
-              <a:t>산출물 ID : GRV_MAN_090  |  버전 : v1.0</a:t>
+              <a:t>산출물 ID : EMP_MAN_090  |  버전 : v1.0</a:t>
             </a:r>
           </a:p>
         </p:txBody>
@@ -22793,7 +22793,7 @@
                 </a:solidFill>
                 <a:latin typeface="맑은 고딕"/>
               </a:rPr>
-              <a:t>아모레퍼시픽 Claimworks-Claims AI 시스템 구축  |  진도 관리 계획서</a:t>
+              <a:t>한빛글로벌 SyncGuard AI 시스템 구축  |  진도 관리 계획서</a:t>
             </a:r>
           </a:p>
         </p:txBody>
@@ -22877,7 +22877,7 @@
                 </a:solidFill>
                 <a:latin typeface="맑은 고딕"/>
               </a:rPr>
-              <a:t>발주사 : AMOREPACIFIC   |   수행사 : ㈜그로브소프트 (GROVE)</a:t>
+              <a:t>발주사 : HANBIT GLOBAL   |   수행사 : ㈜엠파시 (Empasy Inc.)</a:t>
             </a:r>
           </a:p>
         </p:txBody>
@@ -24244,7 +24244,7 @@
                           </a:solidFill>
                           <a:latin typeface="맑은 고딕"/>
                         </a:rPr>
-                        <a:t>• 공식 이슈관리대장(GRV_MAN_030) '긴급(High)' 등록</a:t>
+                        <a:t>• 공식 이슈관리대장(EMP_MAN_030) '긴급(High)' 등록</a:t>
                       </a:r>
                     </a:p>
                     <a:p>
@@ -25091,7 +25091,7 @@
                 </a:solidFill>
                 <a:latin typeface="맑은 고딕"/>
               </a:rPr>
-              <a:t>• 외부 시스템(SSO, Tiumnet, myBeaker) 방화벽이나 API 지연 시 표준 Mock 서버 즉시 구축</a:t>
+              <a:t>• 외부 시스템(SSO, MarketingHub, ProductLab) 방화벽이나 API 지연 시 표준 Mock 서버 즉시 구축</a:t>
             </a:r>
           </a:p>
           <a:p>
@@ -25212,7 +25212,7 @@
                 </a:solidFill>
                 <a:latin typeface="맑은 고딕"/>
               </a:rPr>
-              <a:t>산출물 ID : GRV_MAN_090  |  버전 : v1.0</a:t>
+              <a:t>산출물 ID : EMP_MAN_090  |  버전 : v1.0</a:t>
             </a:r>
           </a:p>
         </p:txBody>
@@ -25424,7 +25424,7 @@
                 </a:solidFill>
                 <a:latin typeface="맑은 고딕"/>
               </a:rPr>
-              <a:t>아모레퍼시픽 Claimworks-Claims AI 시스템 구축  |  진도 관리 계획서</a:t>
+              <a:t>한빛글로벌 SyncGuard AI 시스템 구축  |  진도 관리 계획서</a:t>
             </a:r>
           </a:p>
         </p:txBody>
@@ -25508,7 +25508,7 @@
                 </a:solidFill>
                 <a:latin typeface="맑은 고딕"/>
               </a:rPr>
-              <a:t>발주사 : AMOREPACIFIC   |   수행사 : ㈜그로브소프트 (GROVE)</a:t>
+              <a:t>발주사 : HANBIT GLOBAL   |   수행사 : ㈜엠파시 (Empasy Inc.)</a:t>
             </a:r>
           </a:p>
         </p:txBody>
@@ -26397,7 +26397,7 @@
                           </a:solidFill>
                           <a:latin typeface="맑은 고딕"/>
                         </a:rPr>
-                        <a:t>3.4 myBeaker 연계</a:t>
+                        <a:t>3.4 ProductLab 연계</a:t>
                       </a:r>
                     </a:p>
                   </a:txBody>
@@ -26485,7 +26485,7 @@
                           </a:solidFill>
                           <a:latin typeface="맑은 고딕"/>
                         </a:rPr>
-                        <a:t>• myBeaker 원료·효능·시험결과 실증 데이터 API 조회 성공</a:t>
+                        <a:t>• ProductLab 원료·효능·시험결과 실증 데이터 API 조회 성공</a:t>
                       </a:r>
                     </a:p>
                   </a:txBody>
@@ -28022,7 +28022,7 @@
                 </a:solidFill>
                 <a:latin typeface="맑은 고딕"/>
               </a:rPr>
-              <a:t>산출물 ID : GRV_MAN_090  |  버전 : v1.0</a:t>
+              <a:t>산출물 ID : EMP_MAN_090  |  버전 : v1.0</a:t>
             </a:r>
           </a:p>
         </p:txBody>
@@ -28234,7 +28234,7 @@
                 </a:solidFill>
                 <a:latin typeface="맑은 고딕"/>
               </a:rPr>
-              <a:t>아모레퍼시픽 Claimworks-Claims AI 시스템 구축  |  진도 관리 계획서</a:t>
+              <a:t>한빛글로벌 SyncGuard AI 시스템 구축  |  진도 관리 계획서</a:t>
             </a:r>
           </a:p>
         </p:txBody>
@@ -28318,7 +28318,7 @@
                 </a:solidFill>
                 <a:latin typeface="맑은 고딕"/>
               </a:rPr>
-              <a:t>발주사 : AMOREPACIFIC   |   수행사 : ㈜그로브소프트 (GROVE)</a:t>
+              <a:t>발주사 : HANBIT GLOBAL   |   수행사 : ㈜엠파시 (Empasy Inc.)</a:t>
             </a:r>
           </a:p>
         </p:txBody>
@@ -28542,7 +28542,7 @@
                 </a:solidFill>
                 <a:latin typeface="맑은 고딕"/>
               </a:rPr>
-              <a:t>• AI, 백엔드, 프론트, 기획, 아이시프트 각 파트 리드가 금주 완료 작업 및 산출물 상태 제출</a:t>
+              <a:t>• AI, 백엔드, 프론트, 기획, 데이터브릿지 각 파트 리드가 금주 완료 작업 및 산출물 상태 제출</a:t>
             </a:r>
           </a:p>
           <a:p>
@@ -28785,7 +28785,7 @@
                 </a:solidFill>
                 <a:latin typeface="맑은 고딕"/>
               </a:rPr>
-              <a:t>• PMO(황자영)가 실제 구글 드라이브 산출물 및 Git/테스트 결과 대조 실사</a:t>
+              <a:t>• PMO(이지훈)가 실제 구글 드라이브 산출물 및 Git/테스트 결과 대조 실사</a:t>
             </a:r>
           </a:p>
           <a:p>
@@ -28804,7 +28804,7 @@
                 </a:solidFill>
                 <a:latin typeface="맑은 고딕"/>
               </a:rPr>
-              <a:t>• WBS(GRV_INT_020) 실적 진도율, 달성률, 신호등 자동 산출</a:t>
+              <a:t>• WBS(EMP_INT_020) 실적 진도율, 달성률, 신호등 자동 산출</a:t>
             </a:r>
           </a:p>
         </p:txBody>
@@ -29028,7 +29028,7 @@
                 </a:solidFill>
                 <a:latin typeface="맑은 고딕"/>
               </a:rPr>
-              <a:t>• 수행 PM(김재은)이 계획 대비 편차(SV) 분석 및 차주 중점 계획 수립</a:t>
+              <a:t>• 수행 PM(김태윤)이 계획 대비 편차(SV) 분석 및 차주 중점 계획 수립</a:t>
             </a:r>
           </a:p>
           <a:p>
@@ -29047,7 +29047,7 @@
                 </a:solidFill>
                 <a:latin typeface="맑은 고딕"/>
               </a:rPr>
-              <a:t>• 주간업무보고서(GRV_MAN_010) 발주사 사전 배포</a:t>
+              <a:t>• 주간업무보고서(EMP_MAN_010) 발주사 사전 배포</a:t>
             </a:r>
           </a:p>
         </p:txBody>
@@ -29661,7 +29661,7 @@
                           </a:solidFill>
                           <a:latin typeface="맑은 고딕"/>
                         </a:rPr>
-                        <a:t>수행 PM (김재은)</a:t>
+                        <a:t>수행 PM (김태윤)</a:t>
                       </a:r>
                     </a:p>
                     <a:p>
@@ -29870,7 +29870,7 @@
                           </a:solidFill>
                           <a:latin typeface="맑은 고딕"/>
                         </a:rPr>
-                        <a:t>• 외부 인터페이스(SSO/Tiumnet/myBeaker) 지연, 정책 변경 등으로 마일스톤 일자 변경 필요 시</a:t>
+                        <a:t>• 외부 인터페이스(SSO/MarketingHub/ProductLab) 지연, 정책 변경 등으로 마일스톤 일자 변경 필요 시</a:t>
                       </a:r>
                     </a:p>
                   </a:txBody>
@@ -29939,7 +29939,7 @@
                           </a:solidFill>
                           <a:latin typeface="맑은 고딕"/>
                         </a:rPr>
-                        <a:t>(박주열 / 김경호 합의)</a:t>
+                        <a:t>(정민수 / 한승우 합의)</a:t>
                       </a:r>
                     </a:p>
                   </a:txBody>
@@ -29989,7 +29989,7 @@
                           </a:solidFill>
                           <a:latin typeface="맑은 고딕"/>
                         </a:rPr>
-                        <a:t>• 변경관리대장(GRV_MAN_060)에 변경 요청서 및 영향도 분석 등록</a:t>
+                        <a:t>• 변경관리대장(EMP_MAN_060)에 변경 요청서 및 영향도 분석 등록</a:t>
                       </a:r>
                     </a:p>
                     <a:p>

--- a/public/templates/000_pm_suite/01_프로젝트 관리/01_통합관리/진도_관리_계획서_템플릿.pptx
+++ b/public/templates/000_pm_suite/01_프로젝트 관리/01_통합관리/진도_관리_계획서_템플릿.pptx
@@ -3350,7 +3350,7 @@
                 </a:solidFill>
                 <a:latin typeface="맑은 고딕"/>
               </a:rPr>
-              <a:t>한빛글로벌 SyncGuard AI 시스템 구축</a:t>
+              <a:t>한빛글로벌 SyncFlow AI 시스템 구축</a:t>
             </a:r>
           </a:p>
         </p:txBody>
@@ -3534,22 +3534,22 @@
                     </a:solidFill>
                     <a:lnL w="6350" cmpd="sng">
                       <a:solidFill>
-                        <a:srgbClr val="334155"/>
+                        <a:srgbClr val="1E3A5F"/>
                       </a:solidFill>
                     </a:lnL>
                     <a:lnR w="6350" cmpd="sng">
                       <a:solidFill>
-                        <a:srgbClr val="334155"/>
+                        <a:srgbClr val="1E3A5F"/>
                       </a:solidFill>
                     </a:lnR>
                     <a:lnT w="6350" cmpd="sng">
                       <a:solidFill>
-                        <a:srgbClr val="334155"/>
+                        <a:srgbClr val="1E3A5F"/>
                       </a:solidFill>
                     </a:lnT>
                     <a:lnB w="6350" cmpd="sng">
                       <a:solidFill>
-                        <a:srgbClr val="334155"/>
+                        <a:srgbClr val="1E3A5F"/>
                       </a:solidFill>
                     </a:lnB>
                   </a:tcPr>
@@ -3574,7 +3574,7 @@
                           </a:solidFill>
                           <a:latin typeface="맑은 고딕"/>
                         </a:rPr>
-                        <a:t>한빛글로벌 SyncGuard AI 시스템 구축 용역</a:t>
+                        <a:t>한빛글로벌 SyncFlow AI 시스템 구축 용역</a:t>
                       </a:r>
                     </a:p>
                   </a:txBody>
@@ -3584,22 +3584,22 @@
                     </a:solidFill>
                     <a:lnL w="6350" cmpd="sng">
                       <a:solidFill>
-                        <a:srgbClr val="334155"/>
+                        <a:srgbClr val="1E3A5F"/>
                       </a:solidFill>
                     </a:lnL>
                     <a:lnR w="6350" cmpd="sng">
                       <a:solidFill>
-                        <a:srgbClr val="334155"/>
+                        <a:srgbClr val="1E3A5F"/>
                       </a:solidFill>
                     </a:lnR>
                     <a:lnT w="6350" cmpd="sng">
                       <a:solidFill>
-                        <a:srgbClr val="334155"/>
+                        <a:srgbClr val="1E3A5F"/>
                       </a:solidFill>
                     </a:lnT>
                     <a:lnB w="6350" cmpd="sng">
                       <a:solidFill>
-                        <a:srgbClr val="334155"/>
+                        <a:srgbClr val="1E3A5F"/>
                       </a:solidFill>
                     </a:lnB>
                   </a:tcPr>
@@ -3636,22 +3636,22 @@
                     </a:solidFill>
                     <a:lnL w="6350" cmpd="sng">
                       <a:solidFill>
-                        <a:srgbClr val="334155"/>
+                        <a:srgbClr val="1E3A5F"/>
                       </a:solidFill>
                     </a:lnL>
                     <a:lnR w="6350" cmpd="sng">
                       <a:solidFill>
-                        <a:srgbClr val="334155"/>
+                        <a:srgbClr val="1E3A5F"/>
                       </a:solidFill>
                     </a:lnR>
                     <a:lnT w="6350" cmpd="sng">
                       <a:solidFill>
-                        <a:srgbClr val="334155"/>
+                        <a:srgbClr val="1E3A5F"/>
                       </a:solidFill>
                     </a:lnT>
                     <a:lnB w="6350" cmpd="sng">
                       <a:solidFill>
-                        <a:srgbClr val="334155"/>
+                        <a:srgbClr val="1E3A5F"/>
                       </a:solidFill>
                     </a:lnB>
                   </a:tcPr>
@@ -3686,22 +3686,22 @@
                     </a:solidFill>
                     <a:lnL w="6350" cmpd="sng">
                       <a:solidFill>
-                        <a:srgbClr val="334155"/>
+                        <a:srgbClr val="1E3A5F"/>
                       </a:solidFill>
                     </a:lnL>
                     <a:lnR w="6350" cmpd="sng">
                       <a:solidFill>
-                        <a:srgbClr val="334155"/>
+                        <a:srgbClr val="1E3A5F"/>
                       </a:solidFill>
                     </a:lnR>
                     <a:lnT w="6350" cmpd="sng">
                       <a:solidFill>
-                        <a:srgbClr val="334155"/>
+                        <a:srgbClr val="1E3A5F"/>
                       </a:solidFill>
                     </a:lnT>
                     <a:lnB w="6350" cmpd="sng">
                       <a:solidFill>
-                        <a:srgbClr val="334155"/>
+                        <a:srgbClr val="1E3A5F"/>
                       </a:solidFill>
                     </a:lnB>
                   </a:tcPr>
@@ -3738,22 +3738,22 @@
                     </a:solidFill>
                     <a:lnL w="6350" cmpd="sng">
                       <a:solidFill>
-                        <a:srgbClr val="334155"/>
+                        <a:srgbClr val="1E3A5F"/>
                       </a:solidFill>
                     </a:lnL>
                     <a:lnR w="6350" cmpd="sng">
                       <a:solidFill>
-                        <a:srgbClr val="334155"/>
+                        <a:srgbClr val="1E3A5F"/>
                       </a:solidFill>
                     </a:lnR>
                     <a:lnT w="6350" cmpd="sng">
                       <a:solidFill>
-                        <a:srgbClr val="334155"/>
+                        <a:srgbClr val="1E3A5F"/>
                       </a:solidFill>
                     </a:lnT>
                     <a:lnB w="6350" cmpd="sng">
                       <a:solidFill>
-                        <a:srgbClr val="334155"/>
+                        <a:srgbClr val="1E3A5F"/>
                       </a:solidFill>
                     </a:lnB>
                   </a:tcPr>
@@ -3778,7 +3778,7 @@
                           </a:solidFill>
                           <a:latin typeface="맑은 고딕"/>
                         </a:rPr>
-                        <a:t>주식회사 한빛글로벌 (연구전략Lab / ERP플랫폼기획팀 / RA Lab)</a:t>
+                        <a:t>주식회사 한빛글로벌 (공급망혁신팀 / ERP플랫폼기획팀 / 품질법무검증팀)</a:t>
                       </a:r>
                     </a:p>
                   </a:txBody>
@@ -3788,22 +3788,22 @@
                     </a:solidFill>
                     <a:lnL w="6350" cmpd="sng">
                       <a:solidFill>
-                        <a:srgbClr val="334155"/>
+                        <a:srgbClr val="1E3A5F"/>
                       </a:solidFill>
                     </a:lnL>
                     <a:lnR w="6350" cmpd="sng">
                       <a:solidFill>
-                        <a:srgbClr val="334155"/>
+                        <a:srgbClr val="1E3A5F"/>
                       </a:solidFill>
                     </a:lnR>
                     <a:lnT w="6350" cmpd="sng">
                       <a:solidFill>
-                        <a:srgbClr val="334155"/>
+                        <a:srgbClr val="1E3A5F"/>
                       </a:solidFill>
                     </a:lnT>
                     <a:lnB w="6350" cmpd="sng">
                       <a:solidFill>
-                        <a:srgbClr val="334155"/>
+                        <a:srgbClr val="1E3A5F"/>
                       </a:solidFill>
                     </a:lnB>
                   </a:tcPr>
@@ -3840,22 +3840,22 @@
                     </a:solidFill>
                     <a:lnL w="6350" cmpd="sng">
                       <a:solidFill>
-                        <a:srgbClr val="334155"/>
+                        <a:srgbClr val="1E3A5F"/>
                       </a:solidFill>
                     </a:lnL>
                     <a:lnR w="6350" cmpd="sng">
                       <a:solidFill>
-                        <a:srgbClr val="334155"/>
+                        <a:srgbClr val="1E3A5F"/>
                       </a:solidFill>
                     </a:lnR>
                     <a:lnT w="6350" cmpd="sng">
                       <a:solidFill>
-                        <a:srgbClr val="334155"/>
+                        <a:srgbClr val="1E3A5F"/>
                       </a:solidFill>
                     </a:lnT>
                     <a:lnB w="6350" cmpd="sng">
                       <a:solidFill>
-                        <a:srgbClr val="334155"/>
+                        <a:srgbClr val="1E3A5F"/>
                       </a:solidFill>
                     </a:lnB>
                   </a:tcPr>
@@ -3890,22 +3890,22 @@
                     </a:solidFill>
                     <a:lnL w="6350" cmpd="sng">
                       <a:solidFill>
-                        <a:srgbClr val="334155"/>
+                        <a:srgbClr val="1E3A5F"/>
                       </a:solidFill>
                     </a:lnL>
                     <a:lnR w="6350" cmpd="sng">
                       <a:solidFill>
-                        <a:srgbClr val="334155"/>
+                        <a:srgbClr val="1E3A5F"/>
                       </a:solidFill>
                     </a:lnR>
                     <a:lnT w="6350" cmpd="sng">
                       <a:solidFill>
-                        <a:srgbClr val="334155"/>
+                        <a:srgbClr val="1E3A5F"/>
                       </a:solidFill>
                     </a:lnT>
                     <a:lnB w="6350" cmpd="sng">
                       <a:solidFill>
-                        <a:srgbClr val="334155"/>
+                        <a:srgbClr val="1E3A5F"/>
                       </a:solidFill>
                     </a:lnB>
                   </a:tcPr>
@@ -3942,22 +3942,22 @@
                     </a:solidFill>
                     <a:lnL w="6350" cmpd="sng">
                       <a:solidFill>
-                        <a:srgbClr val="334155"/>
+                        <a:srgbClr val="1E3A5F"/>
                       </a:solidFill>
                     </a:lnL>
                     <a:lnR w="6350" cmpd="sng">
                       <a:solidFill>
-                        <a:srgbClr val="334155"/>
+                        <a:srgbClr val="1E3A5F"/>
                       </a:solidFill>
                     </a:lnR>
                     <a:lnT w="6350" cmpd="sng">
                       <a:solidFill>
-                        <a:srgbClr val="334155"/>
+                        <a:srgbClr val="1E3A5F"/>
                       </a:solidFill>
                     </a:lnT>
                     <a:lnB w="6350" cmpd="sng">
                       <a:solidFill>
-                        <a:srgbClr val="334155"/>
+                        <a:srgbClr val="1E3A5F"/>
                       </a:solidFill>
                     </a:lnB>
                   </a:tcPr>
@@ -3992,22 +3992,22 @@
                     </a:solidFill>
                     <a:lnL w="6350" cmpd="sng">
                       <a:solidFill>
-                        <a:srgbClr val="334155"/>
+                        <a:srgbClr val="1E3A5F"/>
                       </a:solidFill>
                     </a:lnL>
                     <a:lnR w="6350" cmpd="sng">
                       <a:solidFill>
-                        <a:srgbClr val="334155"/>
+                        <a:srgbClr val="1E3A5F"/>
                       </a:solidFill>
                     </a:lnR>
                     <a:lnT w="6350" cmpd="sng">
                       <a:solidFill>
-                        <a:srgbClr val="334155"/>
+                        <a:srgbClr val="1E3A5F"/>
                       </a:solidFill>
                     </a:lnT>
                     <a:lnB w="6350" cmpd="sng">
                       <a:solidFill>
-                        <a:srgbClr val="334155"/>
+                        <a:srgbClr val="1E3A5F"/>
                       </a:solidFill>
                     </a:lnB>
                   </a:tcPr>
@@ -4709,11 +4709,11 @@
             <a:avLst/>
           </a:prstGeom>
           <a:solidFill>
-            <a:srgbClr val="1E293B"/>
+            <a:srgbClr val="0F2942"/>
           </a:solidFill>
           <a:ln w="12700">
             <a:solidFill>
-              <a:srgbClr val="334155"/>
+              <a:srgbClr val="1E3A5F"/>
             </a:solidFill>
           </a:ln>
         </p:spPr>
@@ -4913,7 +4913,7 @@
                 </a:solidFill>
                 <a:latin typeface="맑은 고딕"/>
               </a:rPr>
-              <a:t>• 본 문서는 전사 표준 프로젝트 관리 템플릿이자 한빛글로벌 SyncGuard AI 실전 기준서입니다.</a:t>
+              <a:t>• 본 문서는 전사 표준 프로젝트 관리 템플릿이자 한빛글로벌 SyncFlow AI 실전 기준서입니다.</a:t>
             </a:r>
           </a:p>
           <a:p>
@@ -5265,7 +5265,7 @@
                 </a:solidFill>
                 <a:latin typeface="맑은 고딕"/>
               </a:rPr>
-              <a:t>한빛글로벌 SyncGuard AI 시스템 구축  |  진도 관리 계획서</a:t>
+              <a:t>한빛글로벌 SyncFlow AI 시스템 구축  |  진도 관리 계획서</a:t>
             </a:r>
           </a:p>
         </p:txBody>
@@ -5546,7 +5546,7 @@
                       <a:r>
                         <a:rPr sz="919" b="1">
                           <a:solidFill>
-                            <a:srgbClr val="1E293B"/>
+                            <a:srgbClr val="0F2942"/>
                           </a:solidFill>
                           <a:latin typeface="맑은 고딕"/>
                         </a:rPr>
@@ -5596,11 +5596,11 @@
                       <a:r>
                         <a:rPr sz="919" b="0">
                           <a:solidFill>
-                            <a:srgbClr val="1E293B"/>
-                          </a:solidFill>
-                          <a:latin typeface="맑은 고딕"/>
-                        </a:rPr>
-                        <a:t>• WBS 코드 및 과업명 : [예시: 3.2.2 동영상 음성(STT) 및 핵심 프레임 추출 파이프라인 구현]</a:t>
+                            <a:srgbClr val="0F2942"/>
+                          </a:solidFill>
+                          <a:latin typeface="맑은 고딕"/>
+                        </a:rPr>
+                        <a:t>• WBS 코드 및 과업명 : [예시: 3.2.2 설계도면 음성(STT) 및 핵심 프레임 추출 파이프라인 구현]</a:t>
                       </a:r>
                     </a:p>
                     <a:p>
@@ -5615,7 +5615,7 @@
                       <a:r>
                         <a:rPr sz="919" b="0">
                           <a:solidFill>
-                            <a:srgbClr val="1E293B"/>
+                            <a:srgbClr val="0F2942"/>
                           </a:solidFill>
                           <a:latin typeface="맑은 고딕"/>
                         </a:rPr>
@@ -5665,7 +5665,7 @@
                       <a:r>
                         <a:rPr sz="919" b="0">
                           <a:solidFill>
-                            <a:srgbClr val="1E293B"/>
+                            <a:srgbClr val="0F2942"/>
                           </a:solidFill>
                           <a:latin typeface="맑은 고딕"/>
                         </a:rPr>
@@ -5717,7 +5717,7 @@
                       <a:r>
                         <a:rPr sz="919" b="1">
                           <a:solidFill>
-                            <a:srgbClr val="1E293B"/>
+                            <a:srgbClr val="0F2942"/>
                           </a:solidFill>
                           <a:latin typeface="맑은 고딕"/>
                         </a:rPr>
@@ -5767,7 +5767,7 @@
                       <a:r>
                         <a:rPr sz="919" b="0">
                           <a:solidFill>
-                            <a:srgbClr val="1E293B"/>
+                            <a:srgbClr val="0F2942"/>
                           </a:solidFill>
                           <a:latin typeface="맑은 고딕"/>
                         </a:rPr>
@@ -5786,7 +5786,7 @@
                       <a:r>
                         <a:rPr sz="919" b="0">
                           <a:solidFill>
-                            <a:srgbClr val="1E293B"/>
+                            <a:srgbClr val="0F2942"/>
                           </a:solidFill>
                           <a:latin typeface="맑은 고딕"/>
                         </a:rPr>
@@ -5836,7 +5836,7 @@
                       <a:r>
                         <a:rPr sz="919" b="0">
                           <a:solidFill>
-                            <a:srgbClr val="1E293B"/>
+                            <a:srgbClr val="0F2942"/>
                           </a:solidFill>
                           <a:latin typeface="맑은 고딕"/>
                         </a:rPr>
@@ -5888,7 +5888,7 @@
                       <a:r>
                         <a:rPr sz="919" b="1">
                           <a:solidFill>
-                            <a:srgbClr val="1E293B"/>
+                            <a:srgbClr val="0F2942"/>
                           </a:solidFill>
                           <a:latin typeface="맑은 고딕"/>
                         </a:rPr>
@@ -5907,7 +5907,7 @@
                       <a:r>
                         <a:rPr sz="919" b="1">
                           <a:solidFill>
-                            <a:srgbClr val="1E293B"/>
+                            <a:srgbClr val="0F2942"/>
                           </a:solidFill>
                           <a:latin typeface="맑은 고딕"/>
                         </a:rPr>
@@ -5957,11 +5957,11 @@
                       <a:r>
                         <a:rPr sz="919" b="0">
                           <a:solidFill>
-                            <a:srgbClr val="1E293B"/>
-                          </a:solidFill>
-                          <a:latin typeface="맑은 고딕"/>
-                        </a:rPr>
-                        <a:t>• 대용량(300MB+) 고해상도 광고 동영상 업로드 시 FFmpeg 프레임 추출 메모리 점유 증가로 처리 지연 발생</a:t>
+                            <a:srgbClr val="0F2942"/>
+                          </a:solidFill>
+                          <a:latin typeface="맑은 고딕"/>
+                        </a:rPr>
+                        <a:t>• 대용량(300MB+) 고해상도 구매계약 설계도면 업로드 시 FFmpeg 프레임 추출 메모리 점유 증가로 처리 지연 발생</a:t>
                       </a:r>
                     </a:p>
                     <a:p>
@@ -5976,7 +5976,7 @@
                       <a:r>
                         <a:rPr sz="919" b="0">
                           <a:solidFill>
-                            <a:srgbClr val="1E293B"/>
+                            <a:srgbClr val="0F2942"/>
                           </a:solidFill>
                           <a:latin typeface="맑은 고딕"/>
                         </a:rPr>
@@ -6026,7 +6026,7 @@
                       <a:r>
                         <a:rPr sz="919" b="0">
                           <a:solidFill>
-                            <a:srgbClr val="1E293B"/>
+                            <a:srgbClr val="0F2942"/>
                           </a:solidFill>
                           <a:latin typeface="맑은 고딕"/>
                         </a:rPr>
@@ -6045,7 +6045,7 @@
                       <a:r>
                         <a:rPr sz="919" b="0">
                           <a:solidFill>
-                            <a:srgbClr val="1E293B"/>
+                            <a:srgbClr val="0F2942"/>
                           </a:solidFill>
                           <a:latin typeface="맑은 고딕"/>
                         </a:rPr>
@@ -6097,7 +6097,7 @@
                       <a:r>
                         <a:rPr sz="919" b="1">
                           <a:solidFill>
-                            <a:srgbClr val="1E293B"/>
+                            <a:srgbClr val="0F2942"/>
                           </a:solidFill>
                           <a:latin typeface="맑은 고딕"/>
                         </a:rPr>
@@ -6147,11 +6147,11 @@
                       <a:r>
                         <a:rPr sz="919" b="0">
                           <a:solidFill>
-                            <a:srgbClr val="1E293B"/>
-                          </a:solidFill>
-                          <a:latin typeface="맑은 고딕"/>
-                        </a:rPr>
-                        <a:t>• 후속 과업 [3.3.3 동영상 구간 타임스탬프 매핑] 착수가 3일 지연될 우려가 있으나, 문서(PDF/이미지) 판정 라인에는 영향 없음</a:t>
+                            <a:srgbClr val="0F2942"/>
+                          </a:solidFill>
+                          <a:latin typeface="맑은 고딕"/>
+                        </a:rPr>
+                        <a:t>• 후속 과업 [3.3.3 설계도면 구간 타임스탬프 매핑] 착수가 3일 지연될 우려가 있으나, 문서(PDF/이미지) 판정 라인에는 영향 없음</a:t>
                       </a:r>
                     </a:p>
                     <a:p>
@@ -6166,7 +6166,7 @@
                       <a:r>
                         <a:rPr sz="919" b="0">
                           <a:solidFill>
-                            <a:srgbClr val="1E293B"/>
+                            <a:srgbClr val="0F2942"/>
                           </a:solidFill>
                           <a:latin typeface="맑은 고딕"/>
                         </a:rPr>
@@ -6216,7 +6216,7 @@
                       <a:r>
                         <a:rPr sz="919" b="0">
                           <a:solidFill>
-                            <a:srgbClr val="1E293B"/>
+                            <a:srgbClr val="0F2942"/>
                           </a:solidFill>
                           <a:latin typeface="맑은 고딕"/>
                         </a:rPr>
@@ -6268,7 +6268,7 @@
                       <a:r>
                         <a:rPr sz="919" b="1">
                           <a:solidFill>
-                            <a:srgbClr val="1E293B"/>
+                            <a:srgbClr val="0F2942"/>
                           </a:solidFill>
                           <a:latin typeface="맑은 고딕"/>
                         </a:rPr>
@@ -6287,7 +6287,7 @@
                       <a:r>
                         <a:rPr sz="919" b="1">
                           <a:solidFill>
-                            <a:srgbClr val="1E293B"/>
+                            <a:srgbClr val="0F2942"/>
                           </a:solidFill>
                           <a:latin typeface="맑은 고딕"/>
                         </a:rPr>
@@ -6337,7 +6337,7 @@
                       <a:r>
                         <a:rPr sz="919" b="0">
                           <a:solidFill>
-                            <a:srgbClr val="1E293B"/>
+                            <a:srgbClr val="0F2942"/>
                           </a:solidFill>
                           <a:latin typeface="맑은 고딕"/>
                         </a:rPr>
@@ -6356,7 +6356,7 @@
                       <a:r>
                         <a:rPr sz="919" b="0">
                           <a:solidFill>
-                            <a:srgbClr val="1E293B"/>
+                            <a:srgbClr val="0F2942"/>
                           </a:solidFill>
                           <a:latin typeface="맑은 고딕"/>
                         </a:rPr>
@@ -6406,7 +6406,7 @@
                       <a:r>
                         <a:rPr sz="919" b="0">
                           <a:solidFill>
-                            <a:srgbClr val="1E293B"/>
+                            <a:srgbClr val="0F2942"/>
                           </a:solidFill>
                           <a:latin typeface="맑은 고딕"/>
                         </a:rPr>
@@ -6425,7 +6425,7 @@
                       <a:r>
                         <a:rPr sz="919" b="0">
                           <a:solidFill>
-                            <a:srgbClr val="1E293B"/>
+                            <a:srgbClr val="0F2942"/>
                           </a:solidFill>
                           <a:latin typeface="맑은 고딕"/>
                         </a:rPr>
@@ -6477,7 +6477,7 @@
                       <a:r>
                         <a:rPr sz="919" b="1">
                           <a:solidFill>
-                            <a:srgbClr val="1E293B"/>
+                            <a:srgbClr val="0F2942"/>
                           </a:solidFill>
                           <a:latin typeface="맑은 고딕"/>
                         </a:rPr>
@@ -6496,7 +6496,7 @@
                       <a:r>
                         <a:rPr sz="919" b="1">
                           <a:solidFill>
-                            <a:srgbClr val="1E293B"/>
+                            <a:srgbClr val="0F2942"/>
                           </a:solidFill>
                           <a:latin typeface="맑은 고딕"/>
                         </a:rPr>
@@ -6546,7 +6546,7 @@
                       <a:r>
                         <a:rPr sz="919" b="0">
                           <a:solidFill>
-                            <a:srgbClr val="1E293B"/>
+                            <a:srgbClr val="0F2942"/>
                           </a:solidFill>
                           <a:latin typeface="맑은 고딕"/>
                         </a:rPr>
@@ -6565,11 +6565,11 @@
                       <a:r>
                         <a:rPr sz="919" b="0">
                           <a:solidFill>
-                            <a:srgbClr val="1E293B"/>
-                          </a:solidFill>
-                          <a:latin typeface="맑은 고딕"/>
-                        </a:rPr>
-                        <a:t>• [D+7일] 샘플 광고 영상 20종 단위테스트 통과 및 정상 기준선(100%) 완전 복귀 완료</a:t>
+                            <a:srgbClr val="0F2942"/>
+                          </a:solidFill>
+                          <a:latin typeface="맑은 고딕"/>
+                        </a:rPr>
+                        <a:t>• [D+7일] 샘플 구매계약 영상 20종 단위테스트 통과 및 정상 기준선(100%) 완전 복귀 완료</a:t>
                       </a:r>
                     </a:p>
                   </a:txBody>
@@ -6615,7 +6615,7 @@
                       <a:r>
                         <a:rPr sz="919" b="0">
                           <a:solidFill>
-                            <a:srgbClr val="1E293B"/>
+                            <a:srgbClr val="0F2942"/>
                           </a:solidFill>
                           <a:latin typeface="맑은 고딕"/>
                         </a:rPr>
@@ -6634,7 +6634,7 @@
                       <a:r>
                         <a:rPr sz="919" b="0">
                           <a:solidFill>
-                            <a:srgbClr val="1E293B"/>
+                            <a:srgbClr val="0F2942"/>
                           </a:solidFill>
                           <a:latin typeface="맑은 고딕"/>
                         </a:rPr>
@@ -7112,7 +7112,7 @@
                 </a:solidFill>
                 <a:latin typeface="맑은 고딕"/>
               </a:rPr>
-              <a:t>한빛글로벌 SyncGuard AI 시스템 구축  |  진도 관리 계획서</a:t>
+              <a:t>한빛글로벌 SyncFlow AI 시스템 구축  |  진도 관리 계획서</a:t>
             </a:r>
           </a:p>
         </p:txBody>
@@ -7537,7 +7537,7 @@
                       <a:r>
                         <a:rPr sz="900" b="1">
                           <a:solidFill>
-                            <a:srgbClr val="1E293B"/>
+                            <a:srgbClr val="0F2942"/>
                           </a:solidFill>
                           <a:latin typeface="맑은 고딕"/>
                         </a:rPr>
@@ -7587,7 +7587,7 @@
                       <a:r>
                         <a:rPr sz="900" b="0">
                           <a:solidFill>
-                            <a:srgbClr val="1E293B"/>
+                            <a:srgbClr val="0F2942"/>
                           </a:solidFill>
                           <a:latin typeface="맑은 고딕"/>
                         </a:rPr>
@@ -7637,7 +7637,7 @@
                       <a:r>
                         <a:rPr sz="900" b="0">
                           <a:solidFill>
-                            <a:srgbClr val="1E293B"/>
+                            <a:srgbClr val="0F2942"/>
                           </a:solidFill>
                           <a:latin typeface="맑은 고딕"/>
                         </a:rPr>
@@ -7687,7 +7687,7 @@
                       <a:r>
                         <a:rPr sz="900" b="0">
                           <a:solidFill>
-                            <a:srgbClr val="1E293B"/>
+                            <a:srgbClr val="0F2942"/>
                           </a:solidFill>
                           <a:latin typeface="맑은 고딕"/>
                         </a:rPr>
@@ -7737,7 +7737,7 @@
                       <a:r>
                         <a:rPr sz="900" b="0">
                           <a:solidFill>
-                            <a:srgbClr val="1E293B"/>
+                            <a:srgbClr val="0F2942"/>
                           </a:solidFill>
                           <a:latin typeface="맑은 고딕"/>
                         </a:rPr>
@@ -7789,7 +7789,7 @@
                       <a:r>
                         <a:rPr sz="900" b="1">
                           <a:solidFill>
-                            <a:srgbClr val="1E293B"/>
+                            <a:srgbClr val="0F2942"/>
                           </a:solidFill>
                           <a:latin typeface="맑은 고딕"/>
                         </a:rPr>
@@ -7839,7 +7839,7 @@
                       <a:r>
                         <a:rPr sz="900" b="0">
                           <a:solidFill>
-                            <a:srgbClr val="1E293B"/>
+                            <a:srgbClr val="0F2942"/>
                           </a:solidFill>
                           <a:latin typeface="맑은 고딕"/>
                         </a:rPr>
@@ -7889,7 +7889,7 @@
                       <a:r>
                         <a:rPr sz="900" b="0">
                           <a:solidFill>
-                            <a:srgbClr val="1E293B"/>
+                            <a:srgbClr val="0F2942"/>
                           </a:solidFill>
                           <a:latin typeface="맑은 고딕"/>
                         </a:rPr>
@@ -7939,7 +7939,7 @@
                       <a:r>
                         <a:rPr sz="900" b="0">
                           <a:solidFill>
-                            <a:srgbClr val="1E293B"/>
+                            <a:srgbClr val="0F2942"/>
                           </a:solidFill>
                           <a:latin typeface="맑은 고딕"/>
                         </a:rPr>
@@ -7989,7 +7989,7 @@
                       <a:r>
                         <a:rPr sz="900" b="0">
                           <a:solidFill>
-                            <a:srgbClr val="1E293B"/>
+                            <a:srgbClr val="0F2942"/>
                           </a:solidFill>
                           <a:latin typeface="맑은 고딕"/>
                         </a:rPr>
@@ -8041,7 +8041,7 @@
                       <a:r>
                         <a:rPr sz="900" b="1">
                           <a:solidFill>
-                            <a:srgbClr val="1E293B"/>
+                            <a:srgbClr val="0F2942"/>
                           </a:solidFill>
                           <a:latin typeface="맑은 고딕"/>
                         </a:rPr>
@@ -8091,7 +8091,7 @@
                       <a:r>
                         <a:rPr sz="900" b="0">
                           <a:solidFill>
-                            <a:srgbClr val="1E293B"/>
+                            <a:srgbClr val="0F2942"/>
                           </a:solidFill>
                           <a:latin typeface="맑은 고딕"/>
                         </a:rPr>
@@ -8141,7 +8141,7 @@
                       <a:r>
                         <a:rPr sz="900" b="0">
                           <a:solidFill>
-                            <a:srgbClr val="1E293B"/>
+                            <a:srgbClr val="0F2942"/>
                           </a:solidFill>
                           <a:latin typeface="맑은 고딕"/>
                         </a:rPr>
@@ -8191,7 +8191,7 @@
                       <a:r>
                         <a:rPr sz="900" b="0">
                           <a:solidFill>
-                            <a:srgbClr val="1E293B"/>
+                            <a:srgbClr val="0F2942"/>
                           </a:solidFill>
                           <a:latin typeface="맑은 고딕"/>
                         </a:rPr>
@@ -8241,7 +8241,7 @@
                       <a:r>
                         <a:rPr sz="900" b="0">
                           <a:solidFill>
-                            <a:srgbClr val="1E293B"/>
+                            <a:srgbClr val="0F2942"/>
                           </a:solidFill>
                           <a:latin typeface="맑은 고딕"/>
                         </a:rPr>
@@ -8495,7 +8495,7 @@
             <a:r>
               <a:rPr sz="950" b="0">
                 <a:solidFill>
-                  <a:srgbClr val="1E293B"/>
+                  <a:srgbClr val="0F2942"/>
                 </a:solidFill>
                 <a:latin typeface="맑은 고딕"/>
               </a:rPr>
@@ -8514,7 +8514,7 @@
             <a:r>
               <a:rPr sz="950" b="0">
                 <a:solidFill>
-                  <a:srgbClr val="1E293B"/>
+                  <a:srgbClr val="0F2942"/>
                 </a:solidFill>
                 <a:latin typeface="맑은 고딕"/>
               </a:rPr>
@@ -8533,11 +8533,11 @@
             <a:r>
               <a:rPr sz="950" b="0">
                 <a:solidFill>
-                  <a:srgbClr val="1E293B"/>
+                  <a:srgbClr val="0F2942"/>
                 </a:solidFill>
                 <a:latin typeface="맑은 고딕"/>
               </a:rPr>
-              <a:t>3. 교체 필수 항목 : SyncGuard AI 시스템 구축 사업, [발주사/수행사 조직], [사업기간 및 M1~M6 일정], [산출물 ID 체계], [인력/인프라 수량]</a:t>
+              <a:t>3. 교체 필수 항목 : SyncFlow AI 시스템 구축 사업, [발주사/수행사 조직], [사업기간 및 M1~M6 일정], [산출물 ID 체계], [인력/인프라 수량]</a:t>
             </a:r>
           </a:p>
           <a:p>
@@ -8552,7 +8552,7 @@
             <a:r>
               <a:rPr sz="950" b="0">
                 <a:solidFill>
-                  <a:srgbClr val="1E293B"/>
+                  <a:srgbClr val="0F2942"/>
                 </a:solidFill>
                 <a:latin typeface="맑은 고딕"/>
               </a:rPr>
@@ -10960,7 +10960,7 @@
                 </a:solidFill>
                 <a:latin typeface="맑은 고딕"/>
               </a:rPr>
-              <a:t>한빛글로벌 SyncGuard AI 시스템 구축  |  진도 관리 계획서</a:t>
+              <a:t>한빛글로벌 SyncFlow AI 시스템 구축  |  진도 관리 계획서</a:t>
             </a:r>
           </a:p>
         </p:txBody>
@@ -11264,7 +11264,7 @@
             <a:r>
               <a:rPr sz="1050" b="0">
                 <a:solidFill>
-                  <a:srgbClr val="1E293B"/>
+                  <a:srgbClr val="0F2942"/>
                 </a:solidFill>
                 <a:latin typeface="맑은 고딕"/>
               </a:rPr>
@@ -11283,7 +11283,7 @@
             <a:r>
               <a:rPr sz="1050" b="0">
                 <a:solidFill>
-                  <a:srgbClr val="1E293B"/>
+                  <a:srgbClr val="0F2942"/>
                 </a:solidFill>
                 <a:latin typeface="맑은 고딕"/>
               </a:rPr>
@@ -11302,7 +11302,7 @@
             <a:r>
               <a:rPr sz="1050" b="0">
                 <a:solidFill>
-                  <a:srgbClr val="1E293B"/>
+                  <a:srgbClr val="0F2942"/>
                 </a:solidFill>
                 <a:latin typeface="맑은 고딕"/>
               </a:rPr>
@@ -11526,7 +11526,7 @@
             <a:r>
               <a:rPr sz="1050" b="0">
                 <a:solidFill>
-                  <a:srgbClr val="1E293B"/>
+                  <a:srgbClr val="0F2942"/>
                 </a:solidFill>
                 <a:latin typeface="맑은 고딕"/>
               </a:rPr>
@@ -11545,7 +11545,7 @@
             <a:r>
               <a:rPr sz="1050" b="0">
                 <a:solidFill>
-                  <a:srgbClr val="1E293B"/>
+                  <a:srgbClr val="0F2942"/>
                 </a:solidFill>
                 <a:latin typeface="맑은 고딕"/>
               </a:rPr>
@@ -11564,7 +11564,7 @@
             <a:r>
               <a:rPr sz="1050" b="0">
                 <a:solidFill>
-                  <a:srgbClr val="1E293B"/>
+                  <a:srgbClr val="0F2942"/>
                 </a:solidFill>
                 <a:latin typeface="맑은 고딕"/>
               </a:rPr>
@@ -11788,11 +11788,11 @@
             <a:r>
               <a:rPr sz="1050" b="0">
                 <a:solidFill>
-                  <a:srgbClr val="1E293B"/>
+                  <a:srgbClr val="0F2942"/>
                 </a:solidFill>
                 <a:latin typeface="맑은 고딕"/>
               </a:rPr>
-              <a:t>• 3단계 AI 판정 엔진(규칙+RAG+LLM), ProductLab 실증DB 연계, 사내 SSO/MarketingHub 방화벽 개통을 핵심 임계 경로로 지정</a:t>
+              <a:t>• 3단계 AI 판정 엔진(규칙+RAG+LLM), PLM-Nexus 시험검증DB 연계, 사내 SSO/SRM-Portal 방화벽 개통을 핵심 임계 경로로 지정</a:t>
             </a:r>
           </a:p>
           <a:p>
@@ -11807,7 +11807,7 @@
             <a:r>
               <a:rPr sz="1050" b="0">
                 <a:solidFill>
-                  <a:srgbClr val="1E293B"/>
+                  <a:srgbClr val="0F2942"/>
                 </a:solidFill>
                 <a:latin typeface="맑은 고딕"/>
               </a:rPr>
@@ -11826,7 +11826,7 @@
             <a:r>
               <a:rPr sz="1050" b="0">
                 <a:solidFill>
-                  <a:srgbClr val="1E293B"/>
+                  <a:srgbClr val="0F2942"/>
                 </a:solidFill>
                 <a:latin typeface="맑은 고딕"/>
               </a:rPr>
@@ -12050,7 +12050,7 @@
             <a:r>
               <a:rPr sz="1050" b="0">
                 <a:solidFill>
-                  <a:srgbClr val="1E293B"/>
+                  <a:srgbClr val="0F2942"/>
                 </a:solidFill>
                 <a:latin typeface="맑은 고딕"/>
               </a:rPr>
@@ -12069,7 +12069,7 @@
             <a:r>
               <a:rPr sz="1050" b="0">
                 <a:solidFill>
-                  <a:srgbClr val="1E293B"/>
+                  <a:srgbClr val="0F2942"/>
                 </a:solidFill>
                 <a:latin typeface="맑은 고딕"/>
               </a:rPr>
@@ -12088,7 +12088,7 @@
             <a:r>
               <a:rPr sz="1050" b="0">
                 <a:solidFill>
-                  <a:srgbClr val="1E293B"/>
+                  <a:srgbClr val="0F2942"/>
                 </a:solidFill>
                 <a:latin typeface="맑은 고딕"/>
               </a:rPr>
@@ -12536,7 +12536,7 @@
                 </a:solidFill>
                 <a:latin typeface="맑은 고딕"/>
               </a:rPr>
-              <a:t>한빛글로벌 SyncGuard AI 시스템 구축  |  진도 관리 계획서</a:t>
+              <a:t>한빛글로벌 SyncFlow AI 시스템 구축  |  진도 관리 계획서</a:t>
             </a:r>
           </a:p>
         </p:txBody>
@@ -13021,7 +13021,7 @@
                       <a:r>
                         <a:rPr sz="919" b="1">
                           <a:solidFill>
-                            <a:srgbClr val="1E293B"/>
+                            <a:srgbClr val="0F2942"/>
                           </a:solidFill>
                           <a:latin typeface="맑은 고딕"/>
                         </a:rPr>
@@ -13071,7 +13071,7 @@
                       <a:r>
                         <a:rPr sz="919" b="1">
                           <a:solidFill>
-                            <a:srgbClr val="1E293B"/>
+                            <a:srgbClr val="0F2942"/>
                           </a:solidFill>
                           <a:latin typeface="맑은 고딕"/>
                         </a:rPr>
@@ -13121,7 +13121,7 @@
                       <a:r>
                         <a:rPr sz="919" b="0">
                           <a:solidFill>
-                            <a:srgbClr val="1E293B"/>
+                            <a:srgbClr val="0F2942"/>
                           </a:solidFill>
                           <a:latin typeface="맑은 고딕"/>
                         </a:rPr>
@@ -13171,7 +13171,7 @@
                       <a:r>
                         <a:rPr sz="919" b="1">
                           <a:solidFill>
-                            <a:srgbClr val="1E293B"/>
+                            <a:srgbClr val="0F2942"/>
                           </a:solidFill>
                           <a:latin typeface="맑은 고딕"/>
                         </a:rPr>
@@ -13221,7 +13221,7 @@
                       <a:r>
                         <a:rPr sz="919" b="0">
                           <a:solidFill>
-                            <a:srgbClr val="1E293B"/>
+                            <a:srgbClr val="0F2942"/>
                           </a:solidFill>
                           <a:latin typeface="맑은 고딕"/>
                         </a:rPr>
@@ -13271,7 +13271,7 @@
                       <a:r>
                         <a:rPr sz="919" b="0">
                           <a:solidFill>
-                            <a:srgbClr val="1E293B"/>
+                            <a:srgbClr val="0F2942"/>
                           </a:solidFill>
                           <a:latin typeface="맑은 고딕"/>
                         </a:rPr>
@@ -13290,7 +13290,7 @@
                       <a:r>
                         <a:rPr sz="919" b="0">
                           <a:solidFill>
-                            <a:srgbClr val="1E293B"/>
+                            <a:srgbClr val="0F2942"/>
                           </a:solidFill>
                           <a:latin typeface="맑은 고딕"/>
                         </a:rPr>
@@ -13340,7 +13340,7 @@
                       <a:r>
                         <a:rPr sz="919" b="0">
                           <a:solidFill>
-                            <a:srgbClr val="1E293B"/>
+                            <a:srgbClr val="0F2942"/>
                           </a:solidFill>
                           <a:latin typeface="맑은 고딕"/>
                         </a:rPr>
@@ -13392,7 +13392,7 @@
                       <a:r>
                         <a:rPr sz="919" b="1">
                           <a:solidFill>
-                            <a:srgbClr val="1E293B"/>
+                            <a:srgbClr val="0F2942"/>
                           </a:solidFill>
                           <a:latin typeface="맑은 고딕"/>
                         </a:rPr>
@@ -13442,7 +13442,7 @@
                       <a:r>
                         <a:rPr sz="919" b="1">
                           <a:solidFill>
-                            <a:srgbClr val="1E293B"/>
+                            <a:srgbClr val="0F2942"/>
                           </a:solidFill>
                           <a:latin typeface="맑은 고딕"/>
                         </a:rPr>
@@ -13492,7 +13492,7 @@
                       <a:r>
                         <a:rPr sz="919" b="0">
                           <a:solidFill>
-                            <a:srgbClr val="1E293B"/>
+                            <a:srgbClr val="0F2942"/>
                           </a:solidFill>
                           <a:latin typeface="맑은 고딕"/>
                         </a:rPr>
@@ -13542,7 +13542,7 @@
                       <a:r>
                         <a:rPr sz="919" b="1">
                           <a:solidFill>
-                            <a:srgbClr val="1E293B"/>
+                            <a:srgbClr val="0F2942"/>
                           </a:solidFill>
                           <a:latin typeface="맑은 고딕"/>
                         </a:rPr>
@@ -13592,7 +13592,7 @@
                       <a:r>
                         <a:rPr sz="919" b="0">
                           <a:solidFill>
-                            <a:srgbClr val="1E293B"/>
+                            <a:srgbClr val="0F2942"/>
                           </a:solidFill>
                           <a:latin typeface="맑은 고딕"/>
                         </a:rPr>
@@ -13642,7 +13642,7 @@
                       <a:r>
                         <a:rPr sz="919" b="0">
                           <a:solidFill>
-                            <a:srgbClr val="1E293B"/>
+                            <a:srgbClr val="0F2942"/>
                           </a:solidFill>
                           <a:latin typeface="맑은 고딕"/>
                         </a:rPr>
@@ -13661,7 +13661,7 @@
                       <a:r>
                         <a:rPr sz="919" b="0">
                           <a:solidFill>
-                            <a:srgbClr val="1E293B"/>
+                            <a:srgbClr val="0F2942"/>
                           </a:solidFill>
                           <a:latin typeface="맑은 고딕"/>
                         </a:rPr>
@@ -13711,7 +13711,7 @@
                       <a:r>
                         <a:rPr sz="919" b="0">
                           <a:solidFill>
-                            <a:srgbClr val="1E293B"/>
+                            <a:srgbClr val="0F2942"/>
                           </a:solidFill>
                           <a:latin typeface="맑은 고딕"/>
                         </a:rPr>
@@ -13763,7 +13763,7 @@
                       <a:r>
                         <a:rPr sz="919" b="1">
                           <a:solidFill>
-                            <a:srgbClr val="1E293B"/>
+                            <a:srgbClr val="0F2942"/>
                           </a:solidFill>
                           <a:latin typeface="맑은 고딕"/>
                         </a:rPr>
@@ -13813,7 +13813,7 @@
                       <a:r>
                         <a:rPr sz="919" b="1">
                           <a:solidFill>
-                            <a:srgbClr val="1E293B"/>
+                            <a:srgbClr val="0F2942"/>
                           </a:solidFill>
                           <a:latin typeface="맑은 고딕"/>
                         </a:rPr>
@@ -13863,7 +13863,7 @@
                       <a:r>
                         <a:rPr sz="919" b="0">
                           <a:solidFill>
-                            <a:srgbClr val="1E293B"/>
+                            <a:srgbClr val="0F2942"/>
                           </a:solidFill>
                           <a:latin typeface="맑은 고딕"/>
                         </a:rPr>
@@ -13913,7 +13913,7 @@
                       <a:r>
                         <a:rPr sz="919" b="1">
                           <a:solidFill>
-                            <a:srgbClr val="1E293B"/>
+                            <a:srgbClr val="0F2942"/>
                           </a:solidFill>
                           <a:latin typeface="맑은 고딕"/>
                         </a:rPr>
@@ -13963,7 +13963,7 @@
                       <a:r>
                         <a:rPr sz="919" b="0">
                           <a:solidFill>
-                            <a:srgbClr val="1E293B"/>
+                            <a:srgbClr val="0F2942"/>
                           </a:solidFill>
                           <a:latin typeface="맑은 고딕"/>
                         </a:rPr>
@@ -14013,7 +14013,7 @@
                       <a:r>
                         <a:rPr sz="919" b="0">
                           <a:solidFill>
-                            <a:srgbClr val="1E293B"/>
+                            <a:srgbClr val="0F2942"/>
                           </a:solidFill>
                           <a:latin typeface="맑은 고딕"/>
                         </a:rPr>
@@ -14032,7 +14032,7 @@
                       <a:r>
                         <a:rPr sz="919" b="0">
                           <a:solidFill>
-                            <a:srgbClr val="1E293B"/>
+                            <a:srgbClr val="0F2942"/>
                           </a:solidFill>
                           <a:latin typeface="맑은 고딕"/>
                         </a:rPr>
@@ -14082,11 +14082,11 @@
                       <a:r>
                         <a:rPr sz="919" b="0">
                           <a:solidFill>
-                            <a:srgbClr val="1E293B"/>
-                          </a:solidFill>
-                          <a:latin typeface="맑은 고딕"/>
-                        </a:rPr>
-                        <a:t>3단계 AI 엔진, 100대 규칙사전, Side-by-Side 뷰어, ProductLab 실증DB 및 SSO/MarketingHub 연계</a:t>
+                            <a:srgbClr val="0F2942"/>
+                          </a:solidFill>
+                          <a:latin typeface="맑은 고딕"/>
+                        </a:rPr>
+                        <a:t>3단계 AI 엔진, 100대 규칙사전, Side-by-Side 뷰어, PLM-Nexus 시험검증DB 및 SSO/SRM-Portal 연계</a:t>
                       </a:r>
                     </a:p>
                   </a:txBody>
@@ -14134,7 +14134,7 @@
                       <a:r>
                         <a:rPr sz="919" b="1">
                           <a:solidFill>
-                            <a:srgbClr val="1E293B"/>
+                            <a:srgbClr val="0F2942"/>
                           </a:solidFill>
                           <a:latin typeface="맑은 고딕"/>
                         </a:rPr>
@@ -14184,7 +14184,7 @@
                       <a:r>
                         <a:rPr sz="919" b="1">
                           <a:solidFill>
-                            <a:srgbClr val="1E293B"/>
+                            <a:srgbClr val="0F2942"/>
                           </a:solidFill>
                           <a:latin typeface="맑은 고딕"/>
                         </a:rPr>
@@ -14234,7 +14234,7 @@
                       <a:r>
                         <a:rPr sz="919" b="0">
                           <a:solidFill>
-                            <a:srgbClr val="1E293B"/>
+                            <a:srgbClr val="0F2942"/>
                           </a:solidFill>
                           <a:latin typeface="맑은 고딕"/>
                         </a:rPr>
@@ -14284,7 +14284,7 @@
                       <a:r>
                         <a:rPr sz="919" b="1">
                           <a:solidFill>
-                            <a:srgbClr val="1E293B"/>
+                            <a:srgbClr val="0F2942"/>
                           </a:solidFill>
                           <a:latin typeface="맑은 고딕"/>
                         </a:rPr>
@@ -14334,7 +14334,7 @@
                       <a:r>
                         <a:rPr sz="919" b="0">
                           <a:solidFill>
-                            <a:srgbClr val="1E293B"/>
+                            <a:srgbClr val="0F2942"/>
                           </a:solidFill>
                           <a:latin typeface="맑은 고딕"/>
                         </a:rPr>
@@ -14384,7 +14384,7 @@
                       <a:r>
                         <a:rPr sz="919" b="0">
                           <a:solidFill>
-                            <a:srgbClr val="1E293B"/>
+                            <a:srgbClr val="0F2942"/>
                           </a:solidFill>
                           <a:latin typeface="맑은 고딕"/>
                         </a:rPr>
@@ -14403,7 +14403,7 @@
                       <a:r>
                         <a:rPr sz="919" b="0">
                           <a:solidFill>
-                            <a:srgbClr val="1E293B"/>
+                            <a:srgbClr val="0F2942"/>
                           </a:solidFill>
                           <a:latin typeface="맑은 고딕"/>
                         </a:rPr>
@@ -14453,7 +14453,7 @@
                       <a:r>
                         <a:rPr sz="919" b="0">
                           <a:solidFill>
-                            <a:srgbClr val="1E293B"/>
+                            <a:srgbClr val="0F2942"/>
                           </a:solidFill>
                           <a:latin typeface="맑은 고딕"/>
                         </a:rPr>
@@ -14505,7 +14505,7 @@
                       <a:r>
                         <a:rPr sz="919" b="1">
                           <a:solidFill>
-                            <a:srgbClr val="1E293B"/>
+                            <a:srgbClr val="0F2942"/>
                           </a:solidFill>
                           <a:latin typeface="맑은 고딕"/>
                         </a:rPr>
@@ -14555,7 +14555,7 @@
                       <a:r>
                         <a:rPr sz="919" b="1">
                           <a:solidFill>
-                            <a:srgbClr val="1E293B"/>
+                            <a:srgbClr val="0F2942"/>
                           </a:solidFill>
                           <a:latin typeface="맑은 고딕"/>
                         </a:rPr>
@@ -14605,7 +14605,7 @@
                       <a:r>
                         <a:rPr sz="919" b="0">
                           <a:solidFill>
-                            <a:srgbClr val="1E293B"/>
+                            <a:srgbClr val="0F2942"/>
                           </a:solidFill>
                           <a:latin typeface="맑은 고딕"/>
                         </a:rPr>
@@ -14655,7 +14655,7 @@
                       <a:r>
                         <a:rPr sz="919" b="1">
                           <a:solidFill>
-                            <a:srgbClr val="1E293B"/>
+                            <a:srgbClr val="0F2942"/>
                           </a:solidFill>
                           <a:latin typeface="맑은 고딕"/>
                         </a:rPr>
@@ -14705,7 +14705,7 @@
                       <a:r>
                         <a:rPr sz="919" b="0">
                           <a:solidFill>
-                            <a:srgbClr val="1E293B"/>
+                            <a:srgbClr val="0F2942"/>
                           </a:solidFill>
                           <a:latin typeface="맑은 고딕"/>
                         </a:rPr>
@@ -14755,7 +14755,7 @@
                       <a:r>
                         <a:rPr sz="919" b="0">
                           <a:solidFill>
-                            <a:srgbClr val="1E293B"/>
+                            <a:srgbClr val="0F2942"/>
                           </a:solidFill>
                           <a:latin typeface="맑은 고딕"/>
                         </a:rPr>
@@ -14774,7 +14774,7 @@
                       <a:r>
                         <a:rPr sz="919" b="0">
                           <a:solidFill>
-                            <a:srgbClr val="1E293B"/>
+                            <a:srgbClr val="0F2942"/>
                           </a:solidFill>
                           <a:latin typeface="맑은 고딕"/>
                         </a:rPr>
@@ -14824,7 +14824,7 @@
                       <a:r>
                         <a:rPr sz="919" b="0">
                           <a:solidFill>
-                            <a:srgbClr val="1E293B"/>
+                            <a:srgbClr val="0F2942"/>
                           </a:solidFill>
                           <a:latin typeface="맑은 고딕"/>
                         </a:rPr>
@@ -15078,7 +15078,7 @@
             <a:r>
               <a:rPr sz="900" b="0">
                 <a:solidFill>
-                  <a:srgbClr val="1E293B"/>
+                  <a:srgbClr val="0F2942"/>
                 </a:solidFill>
                 <a:latin typeface="맑은 고딕"/>
               </a:rPr>
@@ -15097,7 +15097,7 @@
             <a:r>
               <a:rPr sz="900" b="0">
                 <a:solidFill>
-                  <a:srgbClr val="1E293B"/>
+                  <a:srgbClr val="0F2942"/>
                 </a:solidFill>
                 <a:latin typeface="맑은 고딕"/>
               </a:rPr>
@@ -15321,7 +15321,7 @@
             <a:r>
               <a:rPr sz="900" b="0">
                 <a:solidFill>
-                  <a:srgbClr val="1E293B"/>
+                  <a:srgbClr val="0F2942"/>
                 </a:solidFill>
                 <a:latin typeface="맑은 고딕"/>
               </a:rPr>
@@ -15340,7 +15340,7 @@
             <a:r>
               <a:rPr sz="900" b="0">
                 <a:solidFill>
-                  <a:srgbClr val="1E293B"/>
+                  <a:srgbClr val="0F2942"/>
                 </a:solidFill>
                 <a:latin typeface="맑은 고딕"/>
               </a:rPr>
@@ -15526,7 +15526,7 @@
                 </a:solidFill>
                 <a:latin typeface="맑은 고딕"/>
               </a:rPr>
-              <a:t>M3 실증DB</a:t>
+              <a:t>M3 시험검증DB</a:t>
             </a:r>
           </a:p>
         </p:txBody>
@@ -15564,7 +15564,7 @@
             <a:r>
               <a:rPr sz="900" b="0">
                 <a:solidFill>
-                  <a:srgbClr val="1E293B"/>
+                  <a:srgbClr val="0F2942"/>
                 </a:solidFill>
                 <a:latin typeface="맑은 고딕"/>
               </a:rPr>
@@ -15583,11 +15583,11 @@
             <a:r>
               <a:rPr sz="900" b="0">
                 <a:solidFill>
-                  <a:srgbClr val="1E293B"/>
+                  <a:srgbClr val="0F2942"/>
                 </a:solidFill>
                 <a:latin typeface="맑은 고딕"/>
               </a:rPr>
-              <a:t>ProductLab 실증자료 DB 연동</a:t>
+              <a:t>PLM-Nexus 시험성적서 DB 연동</a:t>
             </a:r>
           </a:p>
         </p:txBody>
@@ -15807,7 +15807,7 @@
             <a:r>
               <a:rPr sz="900" b="0">
                 <a:solidFill>
-                  <a:srgbClr val="1E293B"/>
+                  <a:srgbClr val="0F2942"/>
                 </a:solidFill>
                 <a:latin typeface="맑은 고딕"/>
               </a:rPr>
@@ -15826,7 +15826,7 @@
             <a:r>
               <a:rPr sz="900" b="0">
                 <a:solidFill>
-                  <a:srgbClr val="1E293B"/>
+                  <a:srgbClr val="0F2942"/>
                 </a:solidFill>
                 <a:latin typeface="맑은 고딕"/>
               </a:rPr>
@@ -16050,7 +16050,7 @@
             <a:r>
               <a:rPr sz="900" b="0">
                 <a:solidFill>
-                  <a:srgbClr val="1E293B"/>
+                  <a:srgbClr val="0F2942"/>
                 </a:solidFill>
                 <a:latin typeface="맑은 고딕"/>
               </a:rPr>
@@ -16069,7 +16069,7 @@
             <a:r>
               <a:rPr sz="900" b="0">
                 <a:solidFill>
-                  <a:srgbClr val="1E293B"/>
+                  <a:srgbClr val="0F2942"/>
                 </a:solidFill>
                 <a:latin typeface="맑은 고딕"/>
               </a:rPr>
@@ -16293,7 +16293,7 @@
             <a:r>
               <a:rPr sz="900" b="0">
                 <a:solidFill>
-                  <a:srgbClr val="1E293B"/>
+                  <a:srgbClr val="0F2942"/>
                 </a:solidFill>
                 <a:latin typeface="맑은 고딕"/>
               </a:rPr>
@@ -16312,7 +16312,7 @@
             <a:r>
               <a:rPr sz="900" b="0">
                 <a:solidFill>
-                  <a:srgbClr val="1E293B"/>
+                  <a:srgbClr val="0F2942"/>
                 </a:solidFill>
                 <a:latin typeface="맑은 고딕"/>
               </a:rPr>
@@ -16630,7 +16630,7 @@
                 </a:solidFill>
                 <a:latin typeface="맑은 고딕"/>
               </a:rPr>
-              <a:t>한빛글로벌 SyncGuard AI 시스템 구축  |  진도 관리 계획서</a:t>
+              <a:t>한빛글로벌 SyncFlow AI 시스템 구축  |  진도 관리 계획서</a:t>
             </a:r>
           </a:p>
         </p:txBody>
@@ -16934,7 +16934,7 @@
             <a:r>
               <a:rPr sz="930" b="0">
                 <a:solidFill>
-                  <a:srgbClr val="1E293B"/>
+                  <a:srgbClr val="0F2942"/>
                 </a:solidFill>
                 <a:latin typeface="맑은 고딕"/>
               </a:rPr>
@@ -16953,7 +16953,7 @@
             <a:r>
               <a:rPr sz="930" b="0">
                 <a:solidFill>
-                  <a:srgbClr val="1E293B"/>
+                  <a:srgbClr val="0F2942"/>
                 </a:solidFill>
                 <a:latin typeface="맑은 고딕"/>
               </a:rPr>
@@ -16972,7 +16972,7 @@
             <a:r>
               <a:rPr sz="930" b="0">
                 <a:solidFill>
-                  <a:srgbClr val="1E293B"/>
+                  <a:srgbClr val="0F2942"/>
                 </a:solidFill>
                 <a:latin typeface="맑은 고딕"/>
               </a:rPr>
@@ -16991,7 +16991,7 @@
             <a:r>
               <a:rPr sz="930" b="0">
                 <a:solidFill>
-                  <a:srgbClr val="1E293B"/>
+                  <a:srgbClr val="0F2942"/>
                 </a:solidFill>
                 <a:latin typeface="맑은 고딕"/>
               </a:rPr>
@@ -17010,7 +17010,7 @@
             <a:r>
               <a:rPr sz="930" b="0">
                 <a:solidFill>
-                  <a:srgbClr val="1E293B"/>
+                  <a:srgbClr val="0F2942"/>
                 </a:solidFill>
                 <a:latin typeface="맑은 고딕"/>
               </a:rPr>
@@ -17029,7 +17029,7 @@
             <a:r>
               <a:rPr sz="930" b="0">
                 <a:solidFill>
-                  <a:srgbClr val="1E293B"/>
+                  <a:srgbClr val="0F2942"/>
                 </a:solidFill>
                 <a:latin typeface="맑은 고딕"/>
               </a:rPr>
@@ -17048,7 +17048,7 @@
             <a:r>
               <a:rPr sz="930" b="0">
                 <a:solidFill>
-                  <a:srgbClr val="1E293B"/>
+                  <a:srgbClr val="0F2942"/>
                 </a:solidFill>
                 <a:latin typeface="맑은 고딕"/>
               </a:rPr>
@@ -17067,7 +17067,7 @@
             <a:r>
               <a:rPr sz="930" b="0">
                 <a:solidFill>
-                  <a:srgbClr val="1E293B"/>
+                  <a:srgbClr val="0F2942"/>
                 </a:solidFill>
                 <a:latin typeface="맑은 고딕"/>
               </a:rPr>
@@ -17086,7 +17086,7 @@
             <a:r>
               <a:rPr sz="930" b="0">
                 <a:solidFill>
-                  <a:srgbClr val="1E293B"/>
+                  <a:srgbClr val="0F2942"/>
                 </a:solidFill>
                 <a:latin typeface="맑은 고딕"/>
               </a:rPr>
@@ -17105,7 +17105,7 @@
             <a:r>
               <a:rPr sz="930" b="0">
                 <a:solidFill>
-                  <a:srgbClr val="1E293B"/>
+                  <a:srgbClr val="0F2942"/>
                 </a:solidFill>
                 <a:latin typeface="맑은 고딕"/>
               </a:rPr>
@@ -17124,11 +17124,11 @@
             <a:r>
               <a:rPr sz="930" b="0">
                 <a:solidFill>
-                  <a:srgbClr val="1E293B"/>
+                  <a:srgbClr val="0F2942"/>
                 </a:solidFill>
                 <a:latin typeface="맑은 고딕"/>
               </a:rPr>
-              <a:t>• 발주사(현업/기술 PM, RA Lab)에 공식 제출되어 검토 회의가 진행 중인 상태</a:t>
+              <a:t>• 발주사(현업/기술 PM, 품질법무검증팀)에 공식 제출되어 검토 회의가 진행 중인 상태</a:t>
             </a:r>
           </a:p>
           <a:p>
@@ -17143,7 +17143,7 @@
             <a:r>
               <a:rPr sz="930" b="0">
                 <a:solidFill>
-                  <a:srgbClr val="1E293B"/>
+                  <a:srgbClr val="0F2942"/>
                 </a:solidFill>
                 <a:latin typeface="맑은 고딕"/>
               </a:rPr>
@@ -17162,7 +17162,7 @@
             <a:r>
               <a:rPr sz="930" b="0">
                 <a:solidFill>
-                  <a:srgbClr val="1E293B"/>
+                  <a:srgbClr val="0F2942"/>
                 </a:solidFill>
                 <a:latin typeface="맑은 고딕"/>
               </a:rPr>
@@ -17181,7 +17181,7 @@
             <a:r>
               <a:rPr sz="930" b="0">
                 <a:solidFill>
-                  <a:srgbClr val="1E293B"/>
+                  <a:srgbClr val="0F2942"/>
                 </a:solidFill>
                 <a:latin typeface="맑은 고딕"/>
               </a:rPr>
@@ -17405,7 +17405,7 @@
             <a:r>
               <a:rPr sz="930" b="0">
                 <a:solidFill>
-                  <a:srgbClr val="1E293B"/>
+                  <a:srgbClr val="0F2942"/>
                 </a:solidFill>
                 <a:latin typeface="맑은 고딕"/>
               </a:rPr>
@@ -17424,7 +17424,7 @@
             <a:r>
               <a:rPr sz="930" b="0">
                 <a:solidFill>
-                  <a:srgbClr val="1E293B"/>
+                  <a:srgbClr val="0F2942"/>
                 </a:solidFill>
                 <a:latin typeface="맑은 고딕"/>
               </a:rPr>
@@ -17443,7 +17443,7 @@
             <a:r>
               <a:rPr sz="930" b="0">
                 <a:solidFill>
-                  <a:srgbClr val="1E293B"/>
+                  <a:srgbClr val="0F2942"/>
                 </a:solidFill>
                 <a:latin typeface="맑은 고딕"/>
               </a:rPr>
@@ -17462,7 +17462,7 @@
             <a:r>
               <a:rPr sz="930" b="0">
                 <a:solidFill>
-                  <a:srgbClr val="1E293B"/>
+                  <a:srgbClr val="0F2942"/>
                 </a:solidFill>
                 <a:latin typeface="맑은 고딕"/>
               </a:rPr>
@@ -17481,7 +17481,7 @@
             <a:r>
               <a:rPr sz="930" b="0">
                 <a:solidFill>
-                  <a:srgbClr val="1E293B"/>
+                  <a:srgbClr val="0F2942"/>
                 </a:solidFill>
                 <a:latin typeface="맑은 고딕"/>
               </a:rPr>
@@ -17500,7 +17500,7 @@
             <a:r>
               <a:rPr sz="930" b="0">
                 <a:solidFill>
-                  <a:srgbClr val="1E293B"/>
+                  <a:srgbClr val="0F2942"/>
                 </a:solidFill>
                 <a:latin typeface="맑은 고딕"/>
               </a:rPr>
@@ -17519,7 +17519,7 @@
             <a:r>
               <a:rPr sz="930" b="0">
                 <a:solidFill>
-                  <a:srgbClr val="1E293B"/>
+                  <a:srgbClr val="0F2942"/>
                 </a:solidFill>
                 <a:latin typeface="맑은 고딕"/>
               </a:rPr>
@@ -17538,7 +17538,7 @@
             <a:r>
               <a:rPr sz="930" b="0">
                 <a:solidFill>
-                  <a:srgbClr val="1E293B"/>
+                  <a:srgbClr val="0F2942"/>
                 </a:solidFill>
                 <a:latin typeface="맑은 고딕"/>
               </a:rPr>
@@ -17557,7 +17557,7 @@
             <a:r>
               <a:rPr sz="930" b="0">
                 <a:solidFill>
-                  <a:srgbClr val="1E293B"/>
+                  <a:srgbClr val="0F2942"/>
                 </a:solidFill>
                 <a:latin typeface="맑은 고딕"/>
               </a:rPr>
@@ -17576,7 +17576,7 @@
             <a:r>
               <a:rPr sz="930" b="0">
                 <a:solidFill>
-                  <a:srgbClr val="1E293B"/>
+                  <a:srgbClr val="0F2942"/>
                 </a:solidFill>
                 <a:latin typeface="맑은 고딕"/>
               </a:rPr>
@@ -17595,7 +17595,7 @@
             <a:r>
               <a:rPr sz="930" b="0">
                 <a:solidFill>
-                  <a:srgbClr val="1E293B"/>
+                  <a:srgbClr val="0F2942"/>
                 </a:solidFill>
                 <a:latin typeface="맑은 고딕"/>
               </a:rPr>
@@ -17614,7 +17614,7 @@
             <a:r>
               <a:rPr sz="930" b="0">
                 <a:solidFill>
-                  <a:srgbClr val="1E293B"/>
+                  <a:srgbClr val="0F2942"/>
                 </a:solidFill>
                 <a:latin typeface="맑은 고딕"/>
               </a:rPr>
@@ -17633,7 +17633,7 @@
             <a:r>
               <a:rPr sz="930" b="0">
                 <a:solidFill>
-                  <a:srgbClr val="1E293B"/>
+                  <a:srgbClr val="0F2942"/>
                 </a:solidFill>
                 <a:latin typeface="맑은 고딕"/>
               </a:rPr>
@@ -17652,7 +17652,7 @@
             <a:r>
               <a:rPr sz="930" b="0">
                 <a:solidFill>
-                  <a:srgbClr val="1E293B"/>
+                  <a:srgbClr val="0F2942"/>
                 </a:solidFill>
                 <a:latin typeface="맑은 고딕"/>
               </a:rPr>
@@ -18100,7 +18100,7 @@
                 </a:solidFill>
                 <a:latin typeface="맑은 고딕"/>
               </a:rPr>
-              <a:t>한빛글로벌 SyncGuard AI 시스템 구축  |  진도 관리 계획서</a:t>
+              <a:t>한빛글로벌 SyncFlow AI 시스템 구축  |  진도 관리 계획서</a:t>
             </a:r>
           </a:p>
         </p:txBody>
@@ -18636,7 +18636,7 @@
                       <a:r>
                         <a:rPr sz="880" b="1">
                           <a:solidFill>
-                            <a:srgbClr val="1E293B"/>
+                            <a:srgbClr val="0F2942"/>
                           </a:solidFill>
                           <a:latin typeface="맑은 고딕"/>
                         </a:rPr>
@@ -18686,7 +18686,7 @@
                       <a:r>
                         <a:rPr sz="880" b="1">
                           <a:solidFill>
-                            <a:srgbClr val="1E293B"/>
+                            <a:srgbClr val="0F2942"/>
                           </a:solidFill>
                           <a:latin typeface="맑은 고딕"/>
                         </a:rPr>
@@ -18736,7 +18736,7 @@
                       <a:r>
                         <a:rPr sz="880" b="0">
                           <a:solidFill>
-                            <a:srgbClr val="1E293B"/>
+                            <a:srgbClr val="0F2942"/>
                           </a:solidFill>
                           <a:latin typeface="맑은 고딕"/>
                         </a:rPr>
@@ -18786,7 +18786,7 @@
                       <a:r>
                         <a:rPr sz="880" b="1">
                           <a:solidFill>
-                            <a:srgbClr val="1E293B"/>
+                            <a:srgbClr val="0F2942"/>
                           </a:solidFill>
                           <a:latin typeface="맑은 고딕"/>
                         </a:rPr>
@@ -18836,7 +18836,7 @@
                       <a:r>
                         <a:rPr sz="880" b="0">
                           <a:solidFill>
-                            <a:srgbClr val="1E293B"/>
+                            <a:srgbClr val="0F2942"/>
                           </a:solidFill>
                           <a:latin typeface="맑은 고딕"/>
                         </a:rPr>
@@ -18886,7 +18886,7 @@
                       <a:r>
                         <a:rPr sz="880" b="0">
                           <a:solidFill>
-                            <a:srgbClr val="1E293B"/>
+                            <a:srgbClr val="0F2942"/>
                           </a:solidFill>
                           <a:latin typeface="맑은 고딕"/>
                         </a:rPr>
@@ -18986,7 +18986,7 @@
                       <a:r>
                         <a:rPr sz="880" b="0">
                           <a:solidFill>
-                            <a:srgbClr val="1E293B"/>
+                            <a:srgbClr val="0F2942"/>
                           </a:solidFill>
                           <a:latin typeface="맑은 고딕"/>
                         </a:rPr>
@@ -19038,7 +19038,7 @@
                       <a:r>
                         <a:rPr sz="880" b="1">
                           <a:solidFill>
-                            <a:srgbClr val="1E293B"/>
+                            <a:srgbClr val="0F2942"/>
                           </a:solidFill>
                           <a:latin typeface="맑은 고딕"/>
                         </a:rPr>
@@ -19088,7 +19088,7 @@
                       <a:r>
                         <a:rPr sz="880" b="1">
                           <a:solidFill>
-                            <a:srgbClr val="1E293B"/>
+                            <a:srgbClr val="0F2942"/>
                           </a:solidFill>
                           <a:latin typeface="맑은 고딕"/>
                         </a:rPr>
@@ -19138,7 +19138,7 @@
                       <a:r>
                         <a:rPr sz="880" b="0">
                           <a:solidFill>
-                            <a:srgbClr val="1E293B"/>
+                            <a:srgbClr val="0F2942"/>
                           </a:solidFill>
                           <a:latin typeface="맑은 고딕"/>
                         </a:rPr>
@@ -19188,7 +19188,7 @@
                       <a:r>
                         <a:rPr sz="880" b="1">
                           <a:solidFill>
-                            <a:srgbClr val="1E293B"/>
+                            <a:srgbClr val="0F2942"/>
                           </a:solidFill>
                           <a:latin typeface="맑은 고딕"/>
                         </a:rPr>
@@ -19238,7 +19238,7 @@
                       <a:r>
                         <a:rPr sz="880" b="0">
                           <a:solidFill>
-                            <a:srgbClr val="1E293B"/>
+                            <a:srgbClr val="0F2942"/>
                           </a:solidFill>
                           <a:latin typeface="맑은 고딕"/>
                         </a:rPr>
@@ -19288,7 +19288,7 @@
                       <a:r>
                         <a:rPr sz="880" b="0">
                           <a:solidFill>
-                            <a:srgbClr val="1E293B"/>
+                            <a:srgbClr val="0F2942"/>
                           </a:solidFill>
                           <a:latin typeface="맑은 고딕"/>
                         </a:rPr>
@@ -19388,7 +19388,7 @@
                       <a:r>
                         <a:rPr sz="880" b="0">
                           <a:solidFill>
-                            <a:srgbClr val="1E293B"/>
+                            <a:srgbClr val="0F2942"/>
                           </a:solidFill>
                           <a:latin typeface="맑은 고딕"/>
                         </a:rPr>
@@ -19440,7 +19440,7 @@
                       <a:r>
                         <a:rPr sz="880" b="1">
                           <a:solidFill>
-                            <a:srgbClr val="1E293B"/>
+                            <a:srgbClr val="0F2942"/>
                           </a:solidFill>
                           <a:latin typeface="맑은 고딕"/>
                         </a:rPr>
@@ -19490,7 +19490,7 @@
                       <a:r>
                         <a:rPr sz="880" b="1">
                           <a:solidFill>
-                            <a:srgbClr val="1E293B"/>
+                            <a:srgbClr val="0F2942"/>
                           </a:solidFill>
                           <a:latin typeface="맑은 고딕"/>
                         </a:rPr>
@@ -19540,7 +19540,7 @@
                       <a:r>
                         <a:rPr sz="880" b="0">
                           <a:solidFill>
-                            <a:srgbClr val="1E293B"/>
+                            <a:srgbClr val="0F2942"/>
                           </a:solidFill>
                           <a:latin typeface="맑은 고딕"/>
                         </a:rPr>
@@ -19590,7 +19590,7 @@
                       <a:r>
                         <a:rPr sz="880" b="1">
                           <a:solidFill>
-                            <a:srgbClr val="1E293B"/>
+                            <a:srgbClr val="0F2942"/>
                           </a:solidFill>
                           <a:latin typeface="맑은 고딕"/>
                         </a:rPr>
@@ -19640,7 +19640,7 @@
                       <a:r>
                         <a:rPr sz="880" b="0">
                           <a:solidFill>
-                            <a:srgbClr val="1E293B"/>
+                            <a:srgbClr val="0F2942"/>
                           </a:solidFill>
                           <a:latin typeface="맑은 고딕"/>
                         </a:rPr>
@@ -19690,7 +19690,7 @@
                       <a:r>
                         <a:rPr sz="880" b="0">
                           <a:solidFill>
-                            <a:srgbClr val="1E293B"/>
+                            <a:srgbClr val="0F2942"/>
                           </a:solidFill>
                           <a:latin typeface="맑은 고딕"/>
                         </a:rPr>
@@ -19790,7 +19790,7 @@
                       <a:r>
                         <a:rPr sz="880" b="0">
                           <a:solidFill>
-                            <a:srgbClr val="1E293B"/>
+                            <a:srgbClr val="0F2942"/>
                           </a:solidFill>
                           <a:latin typeface="맑은 고딕"/>
                         </a:rPr>
@@ -19842,7 +19842,7 @@
                       <a:r>
                         <a:rPr sz="880" b="1">
                           <a:solidFill>
-                            <a:srgbClr val="1E293B"/>
+                            <a:srgbClr val="0F2942"/>
                           </a:solidFill>
                           <a:latin typeface="맑은 고딕"/>
                         </a:rPr>
@@ -19892,7 +19892,7 @@
                       <a:r>
                         <a:rPr sz="880" b="1">
                           <a:solidFill>
-                            <a:srgbClr val="1E293B"/>
+                            <a:srgbClr val="0F2942"/>
                           </a:solidFill>
                           <a:latin typeface="맑은 고딕"/>
                         </a:rPr>
@@ -19942,7 +19942,7 @@
                       <a:r>
                         <a:rPr sz="880" b="0">
                           <a:solidFill>
-                            <a:srgbClr val="1E293B"/>
+                            <a:srgbClr val="0F2942"/>
                           </a:solidFill>
                           <a:latin typeface="맑은 고딕"/>
                         </a:rPr>
@@ -19992,7 +19992,7 @@
                       <a:r>
                         <a:rPr sz="880" b="1">
                           <a:solidFill>
-                            <a:srgbClr val="1E293B"/>
+                            <a:srgbClr val="0F2942"/>
                           </a:solidFill>
                           <a:latin typeface="맑은 고딕"/>
                         </a:rPr>
@@ -20042,7 +20042,7 @@
                       <a:r>
                         <a:rPr sz="880" b="0">
                           <a:solidFill>
-                            <a:srgbClr val="1E293B"/>
+                            <a:srgbClr val="0F2942"/>
                           </a:solidFill>
                           <a:latin typeface="맑은 고딕"/>
                         </a:rPr>
@@ -20092,7 +20092,7 @@
                       <a:r>
                         <a:rPr sz="880" b="0">
                           <a:solidFill>
-                            <a:srgbClr val="1E293B"/>
+                            <a:srgbClr val="0F2942"/>
                           </a:solidFill>
                           <a:latin typeface="맑은 고딕"/>
                         </a:rPr>
@@ -20142,7 +20142,7 @@
                       <a:r>
                         <a:rPr sz="880" b="1">
                           <a:solidFill>
-                            <a:srgbClr val="1E293B"/>
+                            <a:srgbClr val="0F2942"/>
                           </a:solidFill>
                           <a:latin typeface="맑은 고딕"/>
                         </a:rPr>
@@ -20192,7 +20192,7 @@
                       <a:r>
                         <a:rPr sz="880" b="0">
                           <a:solidFill>
-                            <a:srgbClr val="1E293B"/>
+                            <a:srgbClr val="0F2942"/>
                           </a:solidFill>
                           <a:latin typeface="맑은 고딕"/>
                         </a:rPr>
@@ -20244,7 +20244,7 @@
                       <a:r>
                         <a:rPr sz="880" b="1">
                           <a:solidFill>
-                            <a:srgbClr val="1E293B"/>
+                            <a:srgbClr val="0F2942"/>
                           </a:solidFill>
                           <a:latin typeface="맑은 고딕"/>
                         </a:rPr>
@@ -20294,7 +20294,7 @@
                       <a:r>
                         <a:rPr sz="880" b="1">
                           <a:solidFill>
-                            <a:srgbClr val="1E293B"/>
+                            <a:srgbClr val="0F2942"/>
                           </a:solidFill>
                           <a:latin typeface="맑은 고딕"/>
                         </a:rPr>
@@ -20344,7 +20344,7 @@
                       <a:r>
                         <a:rPr sz="880" b="0">
                           <a:solidFill>
-                            <a:srgbClr val="1E293B"/>
+                            <a:srgbClr val="0F2942"/>
                           </a:solidFill>
                           <a:latin typeface="맑은 고딕"/>
                         </a:rPr>
@@ -20394,7 +20394,7 @@
                       <a:r>
                         <a:rPr sz="880" b="1">
                           <a:solidFill>
-                            <a:srgbClr val="1E293B"/>
+                            <a:srgbClr val="0F2942"/>
                           </a:solidFill>
                           <a:latin typeface="맑은 고딕"/>
                         </a:rPr>
@@ -20444,7 +20444,7 @@
                       <a:r>
                         <a:rPr sz="880" b="0">
                           <a:solidFill>
-                            <a:srgbClr val="1E293B"/>
+                            <a:srgbClr val="0F2942"/>
                           </a:solidFill>
                           <a:latin typeface="맑은 고딕"/>
                         </a:rPr>
@@ -20494,7 +20494,7 @@
                       <a:r>
                         <a:rPr sz="880" b="0">
                           <a:solidFill>
-                            <a:srgbClr val="1E293B"/>
+                            <a:srgbClr val="0F2942"/>
                           </a:solidFill>
                           <a:latin typeface="맑은 고딕"/>
                         </a:rPr>
@@ -20544,7 +20544,7 @@
                       <a:r>
                         <a:rPr sz="880" b="1">
                           <a:solidFill>
-                            <a:srgbClr val="1E293B"/>
+                            <a:srgbClr val="0F2942"/>
                           </a:solidFill>
                           <a:latin typeface="맑은 고딕"/>
                         </a:rPr>
@@ -20594,7 +20594,7 @@
                       <a:r>
                         <a:rPr sz="880" b="0">
                           <a:solidFill>
-                            <a:srgbClr val="1E293B"/>
+                            <a:srgbClr val="0F2942"/>
                           </a:solidFill>
                           <a:latin typeface="맑은 고딕"/>
                         </a:rPr>
@@ -20646,7 +20646,7 @@
                       <a:r>
                         <a:rPr sz="880" b="1">
                           <a:solidFill>
-                            <a:srgbClr val="1E293B"/>
+                            <a:srgbClr val="0F2942"/>
                           </a:solidFill>
                           <a:latin typeface="맑은 고딕"/>
                         </a:rPr>
@@ -20696,7 +20696,7 @@
                       <a:r>
                         <a:rPr sz="880" b="1">
                           <a:solidFill>
-                            <a:srgbClr val="1E293B"/>
+                            <a:srgbClr val="0F2942"/>
                           </a:solidFill>
                           <a:latin typeface="맑은 고딕"/>
                         </a:rPr>
@@ -20746,7 +20746,7 @@
                       <a:r>
                         <a:rPr sz="880" b="0">
                           <a:solidFill>
-                            <a:srgbClr val="1E293B"/>
+                            <a:srgbClr val="0F2942"/>
                           </a:solidFill>
                           <a:latin typeface="맑은 고딕"/>
                         </a:rPr>
@@ -20796,7 +20796,7 @@
                       <a:r>
                         <a:rPr sz="880" b="1">
                           <a:solidFill>
-                            <a:srgbClr val="1E293B"/>
+                            <a:srgbClr val="0F2942"/>
                           </a:solidFill>
                           <a:latin typeface="맑은 고딕"/>
                         </a:rPr>
@@ -20846,7 +20846,7 @@
                       <a:r>
                         <a:rPr sz="880" b="0">
                           <a:solidFill>
-                            <a:srgbClr val="1E293B"/>
+                            <a:srgbClr val="0F2942"/>
                           </a:solidFill>
                           <a:latin typeface="맑은 고딕"/>
                         </a:rPr>
@@ -20896,7 +20896,7 @@
                       <a:r>
                         <a:rPr sz="880" b="0">
                           <a:solidFill>
-                            <a:srgbClr val="1E293B"/>
+                            <a:srgbClr val="0F2942"/>
                           </a:solidFill>
                           <a:latin typeface="맑은 고딕"/>
                         </a:rPr>
@@ -20946,7 +20946,7 @@
                       <a:r>
                         <a:rPr sz="880" b="1">
                           <a:solidFill>
-                            <a:srgbClr val="1E293B"/>
+                            <a:srgbClr val="0F2942"/>
                           </a:solidFill>
                           <a:latin typeface="맑은 고딕"/>
                         </a:rPr>
@@ -20996,7 +20996,7 @@
                       <a:r>
                         <a:rPr sz="880" b="0">
                           <a:solidFill>
-                            <a:srgbClr val="1E293B"/>
+                            <a:srgbClr val="0F2942"/>
                           </a:solidFill>
                           <a:latin typeface="맑은 고딕"/>
                         </a:rPr>
@@ -21048,7 +21048,7 @@
                       <a:r>
                         <a:rPr sz="880" b="1">
                           <a:solidFill>
-                            <a:srgbClr val="1E293B"/>
+                            <a:srgbClr val="0F2942"/>
                           </a:solidFill>
                           <a:latin typeface="맑은 고딕"/>
                         </a:rPr>
@@ -21098,7 +21098,7 @@
                       <a:r>
                         <a:rPr sz="880" b="1">
                           <a:solidFill>
-                            <a:srgbClr val="1E293B"/>
+                            <a:srgbClr val="0F2942"/>
                           </a:solidFill>
                           <a:latin typeface="맑은 고딕"/>
                         </a:rPr>
@@ -21148,7 +21148,7 @@
                       <a:r>
                         <a:rPr sz="880" b="0">
                           <a:solidFill>
-                            <a:srgbClr val="1E293B"/>
+                            <a:srgbClr val="0F2942"/>
                           </a:solidFill>
                           <a:latin typeface="맑은 고딕"/>
                         </a:rPr>
@@ -21198,7 +21198,7 @@
                       <a:r>
                         <a:rPr sz="880" b="1">
                           <a:solidFill>
-                            <a:srgbClr val="1E293B"/>
+                            <a:srgbClr val="0F2942"/>
                           </a:solidFill>
                           <a:latin typeface="맑은 고딕"/>
                         </a:rPr>
@@ -21248,7 +21248,7 @@
                       <a:r>
                         <a:rPr sz="880" b="0">
                           <a:solidFill>
-                            <a:srgbClr val="1E293B"/>
+                            <a:srgbClr val="0F2942"/>
                           </a:solidFill>
                           <a:latin typeface="맑은 고딕"/>
                         </a:rPr>
@@ -21298,7 +21298,7 @@
                       <a:r>
                         <a:rPr sz="880" b="0">
                           <a:solidFill>
-                            <a:srgbClr val="1E293B"/>
+                            <a:srgbClr val="0F2942"/>
                           </a:solidFill>
                           <a:latin typeface="맑은 고딕"/>
                         </a:rPr>
@@ -21348,7 +21348,7 @@
                       <a:r>
                         <a:rPr sz="880" b="1">
                           <a:solidFill>
-                            <a:srgbClr val="1E293B"/>
+                            <a:srgbClr val="0F2942"/>
                           </a:solidFill>
                           <a:latin typeface="맑은 고딕"/>
                         </a:rPr>
@@ -21398,7 +21398,7 @@
                       <a:r>
                         <a:rPr sz="880" b="0">
                           <a:solidFill>
-                            <a:srgbClr val="1E293B"/>
+                            <a:srgbClr val="0F2942"/>
                           </a:solidFill>
                           <a:latin typeface="맑은 고딕"/>
                         </a:rPr>
@@ -21450,7 +21450,7 @@
                       <a:r>
                         <a:rPr sz="880" b="1">
                           <a:solidFill>
-                            <a:srgbClr val="1E293B"/>
+                            <a:srgbClr val="0F2942"/>
                           </a:solidFill>
                           <a:latin typeface="맑은 고딕"/>
                         </a:rPr>
@@ -21500,7 +21500,7 @@
                       <a:r>
                         <a:rPr sz="880" b="1">
                           <a:solidFill>
-                            <a:srgbClr val="1E293B"/>
+                            <a:srgbClr val="0F2942"/>
                           </a:solidFill>
                           <a:latin typeface="맑은 고딕"/>
                         </a:rPr>
@@ -21550,7 +21550,7 @@
                       <a:r>
                         <a:rPr sz="880" b="0">
                           <a:solidFill>
-                            <a:srgbClr val="1E293B"/>
+                            <a:srgbClr val="0F2942"/>
                           </a:solidFill>
                           <a:latin typeface="맑은 고딕"/>
                         </a:rPr>
@@ -21600,7 +21600,7 @@
                       <a:r>
                         <a:rPr sz="880" b="1">
                           <a:solidFill>
-                            <a:srgbClr val="1E293B"/>
+                            <a:srgbClr val="0F2942"/>
                           </a:solidFill>
                           <a:latin typeface="맑은 고딕"/>
                         </a:rPr>
@@ -21650,7 +21650,7 @@
                       <a:r>
                         <a:rPr sz="880" b="0">
                           <a:solidFill>
-                            <a:srgbClr val="1E293B"/>
+                            <a:srgbClr val="0F2942"/>
                           </a:solidFill>
                           <a:latin typeface="맑은 고딕"/>
                         </a:rPr>
@@ -21700,7 +21700,7 @@
                       <a:r>
                         <a:rPr sz="880" b="0">
                           <a:solidFill>
-                            <a:srgbClr val="1E293B"/>
+                            <a:srgbClr val="0F2942"/>
                           </a:solidFill>
                           <a:latin typeface="맑은 고딕"/>
                         </a:rPr>
@@ -21750,7 +21750,7 @@
                       <a:r>
                         <a:rPr sz="880" b="1">
                           <a:solidFill>
-                            <a:srgbClr val="1E293B"/>
+                            <a:srgbClr val="0F2942"/>
                           </a:solidFill>
                           <a:latin typeface="맑은 고딕"/>
                         </a:rPr>
@@ -21800,7 +21800,7 @@
                       <a:r>
                         <a:rPr sz="880" b="0">
                           <a:solidFill>
-                            <a:srgbClr val="1E293B"/>
+                            <a:srgbClr val="0F2942"/>
                           </a:solidFill>
                           <a:latin typeface="맑은 고딕"/>
                         </a:rPr>
@@ -21852,7 +21852,7 @@
                       <a:r>
                         <a:rPr sz="880" b="1">
                           <a:solidFill>
-                            <a:srgbClr val="1E293B"/>
+                            <a:srgbClr val="0F2942"/>
                           </a:solidFill>
                           <a:latin typeface="맑은 고딕"/>
                         </a:rPr>
@@ -21902,7 +21902,7 @@
                       <a:r>
                         <a:rPr sz="880" b="1">
                           <a:solidFill>
-                            <a:srgbClr val="1E293B"/>
+                            <a:srgbClr val="0F2942"/>
                           </a:solidFill>
                           <a:latin typeface="맑은 고딕"/>
                         </a:rPr>
@@ -21952,7 +21952,7 @@
                       <a:r>
                         <a:rPr sz="880" b="0">
                           <a:solidFill>
-                            <a:srgbClr val="1E293B"/>
+                            <a:srgbClr val="0F2942"/>
                           </a:solidFill>
                           <a:latin typeface="맑은 고딕"/>
                         </a:rPr>
@@ -22002,7 +22002,7 @@
                       <a:r>
                         <a:rPr sz="880" b="1">
                           <a:solidFill>
-                            <a:srgbClr val="1E293B"/>
+                            <a:srgbClr val="0F2942"/>
                           </a:solidFill>
                           <a:latin typeface="맑은 고딕"/>
                         </a:rPr>
@@ -22052,7 +22052,7 @@
                       <a:r>
                         <a:rPr sz="880" b="0">
                           <a:solidFill>
-                            <a:srgbClr val="1E293B"/>
+                            <a:srgbClr val="0F2942"/>
                           </a:solidFill>
                           <a:latin typeface="맑은 고딕"/>
                         </a:rPr>
@@ -22102,7 +22102,7 @@
                       <a:r>
                         <a:rPr sz="880" b="0">
                           <a:solidFill>
-                            <a:srgbClr val="1E293B"/>
+                            <a:srgbClr val="0F2942"/>
                           </a:solidFill>
                           <a:latin typeface="맑은 고딕"/>
                         </a:rPr>
@@ -22202,7 +22202,7 @@
                       <a:r>
                         <a:rPr sz="880" b="0">
                           <a:solidFill>
-                            <a:srgbClr val="1E293B"/>
+                            <a:srgbClr val="0F2942"/>
                           </a:solidFill>
                           <a:latin typeface="맑은 고딕"/>
                         </a:rPr>
@@ -22456,11 +22456,11 @@
             <a:r>
               <a:rPr sz="950" b="0">
                 <a:solidFill>
-                  <a:srgbClr val="1E293B"/>
+                  <a:srgbClr val="0F2942"/>
                 </a:solidFill>
                 <a:latin typeface="맑은 고딕"/>
               </a:rPr>
-              <a:t>• [2026.10월 말] 3.0% (착수 완료)  ➔  [11월 말 / M1] 20.0% (분석 완료·설계 승인)  ➔  [12월 말] 30.0% (설계 완료·인프라/기반 구축)  ➔  [2027.01월 말 / M2·M3] 45.0% (AI 엔진·실증DB 검증)</a:t>
+              <a:t>• [2026.10월 말] 3.0% (착수 완료)  ➔  [11월 말 / M1] 20.0% (분석 완료·설계 승인)  ➔  [12월 말] 30.0% (설계 완료·인프라/기반 구축)  ➔  [2027.01월 말 / M2·M3] 45.0% (AI 엔진·시험검증DB 검증)</a:t>
             </a:r>
           </a:p>
           <a:p>
@@ -22475,7 +22475,7 @@
             <a:r>
               <a:rPr sz="950" b="0">
                 <a:solidFill>
-                  <a:srgbClr val="1E293B"/>
+                  <a:srgbClr val="0F2942"/>
                 </a:solidFill>
                 <a:latin typeface="맑은 고딕"/>
               </a:rPr>
@@ -22793,7 +22793,7 @@
                 </a:solidFill>
                 <a:latin typeface="맑은 고딕"/>
               </a:rPr>
-              <a:t>한빛글로벌 SyncGuard AI 시스템 구축  |  진도 관리 계획서</a:t>
+              <a:t>한빛글로벌 SyncFlow AI 시스템 구축  |  진도 관리 계획서</a:t>
             </a:r>
           </a:p>
         </p:txBody>
@@ -23277,7 +23277,7 @@
                       <a:r>
                         <a:rPr sz="919" b="1">
                           <a:solidFill>
-                            <a:srgbClr val="1E293B"/>
+                            <a:srgbClr val="0F2942"/>
                           </a:solidFill>
                           <a:latin typeface="맑은 고딕"/>
                         </a:rPr>
@@ -23296,7 +23296,7 @@
                       <a:r>
                         <a:rPr sz="919" b="1">
                           <a:solidFill>
-                            <a:srgbClr val="1E293B"/>
+                            <a:srgbClr val="0F2942"/>
                           </a:solidFill>
                           <a:latin typeface="맑은 고딕"/>
                         </a:rPr>
@@ -23346,7 +23346,7 @@
                       <a:r>
                         <a:rPr sz="919" b="0">
                           <a:solidFill>
-                            <a:srgbClr val="1E293B"/>
+                            <a:srgbClr val="0F2942"/>
                           </a:solidFill>
                           <a:latin typeface="맑은 고딕"/>
                         </a:rPr>
@@ -23396,7 +23396,7 @@
                       <a:r>
                         <a:rPr sz="919" b="0">
                           <a:solidFill>
-                            <a:srgbClr val="1E293B"/>
+                            <a:srgbClr val="0F2942"/>
                           </a:solidFill>
                           <a:latin typeface="맑은 고딕"/>
                         </a:rPr>
@@ -23415,7 +23415,7 @@
                       <a:r>
                         <a:rPr sz="919" b="0">
                           <a:solidFill>
-                            <a:srgbClr val="1E293B"/>
+                            <a:srgbClr val="0F2942"/>
                           </a:solidFill>
                           <a:latin typeface="맑은 고딕"/>
                         </a:rPr>
@@ -23465,7 +23465,7 @@
                       <a:r>
                         <a:rPr sz="919" b="0">
                           <a:solidFill>
-                            <a:srgbClr val="1E293B"/>
+                            <a:srgbClr val="0F2942"/>
                           </a:solidFill>
                           <a:latin typeface="맑은 고딕"/>
                         </a:rPr>
@@ -23484,7 +23484,7 @@
                       <a:r>
                         <a:rPr sz="919" b="0">
                           <a:solidFill>
-                            <a:srgbClr val="1E293B"/>
+                            <a:srgbClr val="0F2942"/>
                           </a:solidFill>
                           <a:latin typeface="맑은 고딕"/>
                         </a:rPr>
@@ -23534,7 +23534,7 @@
                       <a:r>
                         <a:rPr sz="919" b="0">
                           <a:solidFill>
-                            <a:srgbClr val="1E293B"/>
+                            <a:srgbClr val="0F2942"/>
                           </a:solidFill>
                           <a:latin typeface="맑은 고딕"/>
                         </a:rPr>
@@ -23553,7 +23553,7 @@
                       <a:r>
                         <a:rPr sz="919" b="0">
                           <a:solidFill>
-                            <a:srgbClr val="1E293B"/>
+                            <a:srgbClr val="0F2942"/>
                           </a:solidFill>
                           <a:latin typeface="맑은 고딕"/>
                         </a:rPr>
@@ -23655,7 +23655,7 @@
                       <a:r>
                         <a:rPr sz="919" b="1">
                           <a:solidFill>
-                            <a:srgbClr val="1E293B"/>
+                            <a:srgbClr val="0F2942"/>
                           </a:solidFill>
                           <a:latin typeface="맑은 고딕"/>
                         </a:rPr>
@@ -23674,7 +23674,7 @@
                       <a:r>
                         <a:rPr sz="919" b="1">
                           <a:solidFill>
-                            <a:srgbClr val="1E293B"/>
+                            <a:srgbClr val="0F2942"/>
                           </a:solidFill>
                           <a:latin typeface="맑은 고딕"/>
                         </a:rPr>
@@ -23724,7 +23724,7 @@
                       <a:r>
                         <a:rPr sz="919" b="0">
                           <a:solidFill>
-                            <a:srgbClr val="1E293B"/>
+                            <a:srgbClr val="0F2942"/>
                           </a:solidFill>
                           <a:latin typeface="맑은 고딕"/>
                         </a:rPr>
@@ -23774,7 +23774,7 @@
                       <a:r>
                         <a:rPr sz="919" b="0">
                           <a:solidFill>
-                            <a:srgbClr val="1E293B"/>
+                            <a:srgbClr val="0F2942"/>
                           </a:solidFill>
                           <a:latin typeface="맑은 고딕"/>
                         </a:rPr>
@@ -23793,7 +23793,7 @@
                       <a:r>
                         <a:rPr sz="919" b="0">
                           <a:solidFill>
-                            <a:srgbClr val="1E293B"/>
+                            <a:srgbClr val="0F2942"/>
                           </a:solidFill>
                           <a:latin typeface="맑은 고딕"/>
                         </a:rPr>
@@ -23843,7 +23843,7 @@
                       <a:r>
                         <a:rPr sz="919" b="0">
                           <a:solidFill>
-                            <a:srgbClr val="1E293B"/>
+                            <a:srgbClr val="0F2942"/>
                           </a:solidFill>
                           <a:latin typeface="맑은 고딕"/>
                         </a:rPr>
@@ -23862,7 +23862,7 @@
                       <a:r>
                         <a:rPr sz="919" b="0">
                           <a:solidFill>
-                            <a:srgbClr val="1E293B"/>
+                            <a:srgbClr val="0F2942"/>
                           </a:solidFill>
                           <a:latin typeface="맑은 고딕"/>
                         </a:rPr>
@@ -23881,7 +23881,7 @@
                       <a:r>
                         <a:rPr sz="919" b="0">
                           <a:solidFill>
-                            <a:srgbClr val="1E293B"/>
+                            <a:srgbClr val="0F2942"/>
                           </a:solidFill>
                           <a:latin typeface="맑은 고딕"/>
                         </a:rPr>
@@ -23931,7 +23931,7 @@
                       <a:r>
                         <a:rPr sz="919" b="0">
                           <a:solidFill>
-                            <a:srgbClr val="1E293B"/>
+                            <a:srgbClr val="0F2942"/>
                           </a:solidFill>
                           <a:latin typeface="맑은 고딕"/>
                         </a:rPr>
@@ -23950,7 +23950,7 @@
                       <a:r>
                         <a:rPr sz="919" b="0">
                           <a:solidFill>
-                            <a:srgbClr val="1E293B"/>
+                            <a:srgbClr val="0F2942"/>
                           </a:solidFill>
                           <a:latin typeface="맑은 고딕"/>
                         </a:rPr>
@@ -24052,7 +24052,7 @@
                       <a:r>
                         <a:rPr sz="919" b="1">
                           <a:solidFill>
-                            <a:srgbClr val="1E293B"/>
+                            <a:srgbClr val="0F2942"/>
                           </a:solidFill>
                           <a:latin typeface="맑은 고딕"/>
                         </a:rPr>
@@ -24071,7 +24071,7 @@
                       <a:r>
                         <a:rPr sz="919" b="1">
                           <a:solidFill>
-                            <a:srgbClr val="1E293B"/>
+                            <a:srgbClr val="0F2942"/>
                           </a:solidFill>
                           <a:latin typeface="맑은 고딕"/>
                         </a:rPr>
@@ -24121,7 +24121,7 @@
                       <a:r>
                         <a:rPr sz="919" b="0">
                           <a:solidFill>
-                            <a:srgbClr val="1E293B"/>
+                            <a:srgbClr val="0F2942"/>
                           </a:solidFill>
                           <a:latin typeface="맑은 고딕"/>
                         </a:rPr>
@@ -24171,7 +24171,7 @@
                       <a:r>
                         <a:rPr sz="919" b="0">
                           <a:solidFill>
-                            <a:srgbClr val="1E293B"/>
+                            <a:srgbClr val="0F2942"/>
                           </a:solidFill>
                           <a:latin typeface="맑은 고딕"/>
                         </a:rPr>
@@ -24190,7 +24190,7 @@
                       <a:r>
                         <a:rPr sz="919" b="0">
                           <a:solidFill>
-                            <a:srgbClr val="1E293B"/>
+                            <a:srgbClr val="0F2942"/>
                           </a:solidFill>
                           <a:latin typeface="맑은 고딕"/>
                         </a:rPr>
@@ -24240,7 +24240,7 @@
                       <a:r>
                         <a:rPr sz="919" b="0">
                           <a:solidFill>
-                            <a:srgbClr val="1E293B"/>
+                            <a:srgbClr val="0F2942"/>
                           </a:solidFill>
                           <a:latin typeface="맑은 고딕"/>
                         </a:rPr>
@@ -24259,7 +24259,7 @@
                       <a:r>
                         <a:rPr sz="919" b="0">
                           <a:solidFill>
-                            <a:srgbClr val="1E293B"/>
+                            <a:srgbClr val="0F2942"/>
                           </a:solidFill>
                           <a:latin typeface="맑은 고딕"/>
                         </a:rPr>
@@ -24278,7 +24278,7 @@
                       <a:r>
                         <a:rPr sz="919" b="0">
                           <a:solidFill>
-                            <a:srgbClr val="1E293B"/>
+                            <a:srgbClr val="0F2942"/>
                           </a:solidFill>
                           <a:latin typeface="맑은 고딕"/>
                         </a:rPr>
@@ -24328,7 +24328,7 @@
                       <a:r>
                         <a:rPr sz="919" b="0">
                           <a:solidFill>
-                            <a:srgbClr val="1E293B"/>
+                            <a:srgbClr val="0F2942"/>
                           </a:solidFill>
                           <a:latin typeface="맑은 고딕"/>
                         </a:rPr>
@@ -24347,7 +24347,7 @@
                       <a:r>
                         <a:rPr sz="919" b="0">
                           <a:solidFill>
-                            <a:srgbClr val="1E293B"/>
+                            <a:srgbClr val="0F2942"/>
                           </a:solidFill>
                           <a:latin typeface="맑은 고딕"/>
                         </a:rPr>
@@ -24601,7 +24601,7 @@
             <a:r>
               <a:rPr sz="919" b="0">
                 <a:solidFill>
-                  <a:srgbClr val="1E293B"/>
+                  <a:srgbClr val="0F2942"/>
                 </a:solidFill>
                 <a:latin typeface="맑은 고딕"/>
               </a:rPr>
@@ -24620,7 +24620,7 @@
             <a:r>
               <a:rPr sz="919" b="0">
                 <a:solidFill>
-                  <a:srgbClr val="1E293B"/>
+                  <a:srgbClr val="0F2942"/>
                 </a:solidFill>
                 <a:latin typeface="맑은 고딕"/>
               </a:rPr>
@@ -24844,7 +24844,7 @@
             <a:r>
               <a:rPr sz="919" b="0">
                 <a:solidFill>
-                  <a:srgbClr val="1E293B"/>
+                  <a:srgbClr val="0F2942"/>
                 </a:solidFill>
                 <a:latin typeface="맑은 고딕"/>
               </a:rPr>
@@ -24863,11 +24863,11 @@
             <a:r>
               <a:rPr sz="919" b="0">
                 <a:solidFill>
-                  <a:srgbClr val="1E293B"/>
+                  <a:srgbClr val="0F2942"/>
                 </a:solidFill>
                 <a:latin typeface="맑은 고딕"/>
               </a:rPr>
-              <a:t>• 예: 문서 파싱/OCR 또는 실증DB 매핑 병목 시 AI·백엔드 인력 집중 배치</a:t>
+              <a:t>• 예: 문서 파싱/OCR 또는 시험검증DB 매핑 병목 시 AI·백엔드 인력 집중 배치</a:t>
             </a:r>
           </a:p>
         </p:txBody>
@@ -25087,11 +25087,11 @@
             <a:r>
               <a:rPr sz="919" b="0">
                 <a:solidFill>
-                  <a:srgbClr val="1E293B"/>
+                  <a:srgbClr val="0F2942"/>
                 </a:solidFill>
                 <a:latin typeface="맑은 고딕"/>
               </a:rPr>
-              <a:t>• 외부 시스템(SSO, MarketingHub, ProductLab) 방화벽이나 API 지연 시 표준 Mock 서버 즉시 구축</a:t>
+              <a:t>• 외부 시스템(SSO, SRM-Portal, PLM-Nexus) 방화벽이나 API 지연 시 표준 Mock 서버 즉시 구축</a:t>
             </a:r>
           </a:p>
           <a:p>
@@ -25106,7 +25106,7 @@
             <a:r>
               <a:rPr sz="919" b="0">
                 <a:solidFill>
-                  <a:srgbClr val="1E293B"/>
+                  <a:srgbClr val="0F2942"/>
                 </a:solidFill>
                 <a:latin typeface="맑은 고딕"/>
               </a:rPr>
@@ -25424,7 +25424,7 @@
                 </a:solidFill>
                 <a:latin typeface="맑은 고딕"/>
               </a:rPr>
-              <a:t>한빛글로벌 SyncGuard AI 시스템 구축  |  진도 관리 계획서</a:t>
+              <a:t>한빛글로벌 SyncFlow AI 시스템 구축  |  진도 관리 계획서</a:t>
             </a:r>
           </a:p>
         </p:txBody>
@@ -25858,7 +25858,7 @@
                       <a:r>
                         <a:rPr sz="890" b="1">
                           <a:solidFill>
-                            <a:srgbClr val="1E293B"/>
+                            <a:srgbClr val="0F2942"/>
                           </a:solidFill>
                           <a:latin typeface="맑은 고딕"/>
                         </a:rPr>
@@ -25877,7 +25877,7 @@
                       <a:r>
                         <a:rPr sz="890" b="1">
                           <a:solidFill>
-                            <a:srgbClr val="1E293B"/>
+                            <a:srgbClr val="0F2942"/>
                           </a:solidFill>
                           <a:latin typeface="맑은 고딕"/>
                         </a:rPr>
@@ -25927,7 +25927,7 @@
                       <a:r>
                         <a:rPr sz="890" b="1">
                           <a:solidFill>
-                            <a:srgbClr val="1E293B"/>
+                            <a:srgbClr val="0F2942"/>
                           </a:solidFill>
                           <a:latin typeface="맑은 고딕"/>
                         </a:rPr>
@@ -25977,7 +25977,7 @@
                       <a:r>
                         <a:rPr sz="890" b="0">
                           <a:solidFill>
-                            <a:srgbClr val="1E293B"/>
+                            <a:srgbClr val="0F2942"/>
                           </a:solidFill>
                           <a:latin typeface="맑은 고딕"/>
                         </a:rPr>
@@ -25996,7 +25996,7 @@
                       <a:r>
                         <a:rPr sz="890" b="0">
                           <a:solidFill>
-                            <a:srgbClr val="1E293B"/>
+                            <a:srgbClr val="0F2942"/>
                           </a:solidFill>
                           <a:latin typeface="맑은 고딕"/>
                         </a:rPr>
@@ -26046,7 +26046,7 @@
                       <a:r>
                         <a:rPr sz="890" b="0">
                           <a:solidFill>
-                            <a:srgbClr val="1E293B"/>
+                            <a:srgbClr val="0F2942"/>
                           </a:solidFill>
                           <a:latin typeface="맑은 고딕"/>
                         </a:rPr>
@@ -26065,7 +26065,7 @@
                       <a:r>
                         <a:rPr sz="890" b="0">
                           <a:solidFill>
-                            <a:srgbClr val="1E293B"/>
+                            <a:srgbClr val="0F2942"/>
                           </a:solidFill>
                           <a:latin typeface="맑은 고딕"/>
                         </a:rPr>
@@ -26115,7 +26115,7 @@
                       <a:r>
                         <a:rPr sz="890" b="0">
                           <a:solidFill>
-                            <a:srgbClr val="1E293B"/>
+                            <a:srgbClr val="0F2942"/>
                           </a:solidFill>
                           <a:latin typeface="맑은 고딕"/>
                         </a:rPr>
@@ -26134,7 +26134,7 @@
                       <a:r>
                         <a:rPr sz="890" b="0">
                           <a:solidFill>
-                            <a:srgbClr val="1E293B"/>
+                            <a:srgbClr val="0F2942"/>
                           </a:solidFill>
                           <a:latin typeface="맑은 고딕"/>
                         </a:rPr>
@@ -26184,7 +26184,7 @@
                       <a:r>
                         <a:rPr sz="890" b="0">
                           <a:solidFill>
-                            <a:srgbClr val="1E293B"/>
+                            <a:srgbClr val="0F2942"/>
                           </a:solidFill>
                           <a:latin typeface="맑은 고딕"/>
                         </a:rPr>
@@ -26203,7 +26203,7 @@
                       <a:r>
                         <a:rPr sz="890" b="0">
                           <a:solidFill>
-                            <a:srgbClr val="1E293B"/>
+                            <a:srgbClr val="0F2942"/>
                           </a:solidFill>
                           <a:latin typeface="맑은 고딕"/>
                         </a:rPr>
@@ -26255,7 +26255,7 @@
                       <a:r>
                         <a:rPr sz="890" b="1">
                           <a:solidFill>
-                            <a:srgbClr val="1E293B"/>
+                            <a:srgbClr val="0F2942"/>
                           </a:solidFill>
                           <a:latin typeface="맑은 고딕"/>
                         </a:rPr>
@@ -26274,11 +26274,11 @@
                       <a:r>
                         <a:rPr sz="890" b="1">
                           <a:solidFill>
-                            <a:srgbClr val="1E293B"/>
-                          </a:solidFill>
-                          <a:latin typeface="맑은 고딕"/>
-                        </a:rPr>
-                        <a:t>엔진 &amp; 실증DB 검증</a:t>
+                            <a:srgbClr val="0F2942"/>
+                          </a:solidFill>
+                          <a:latin typeface="맑은 고딕"/>
+                        </a:rPr>
+                        <a:t>엔진 &amp; 시험검증DB 검증</a:t>
                       </a:r>
                     </a:p>
                   </a:txBody>
@@ -26324,7 +26324,7 @@
                       <a:r>
                         <a:rPr sz="890" b="1">
                           <a:solidFill>
-                            <a:srgbClr val="1E293B"/>
+                            <a:srgbClr val="0F2942"/>
                           </a:solidFill>
                           <a:latin typeface="맑은 고딕"/>
                         </a:rPr>
@@ -26374,7 +26374,7 @@
                       <a:r>
                         <a:rPr sz="890" b="0">
                           <a:solidFill>
-                            <a:srgbClr val="1E293B"/>
+                            <a:srgbClr val="0F2942"/>
                           </a:solidFill>
                           <a:latin typeface="맑은 고딕"/>
                         </a:rPr>
@@ -26393,11 +26393,11 @@
                       <a:r>
                         <a:rPr sz="890" b="0">
                           <a:solidFill>
-                            <a:srgbClr val="1E293B"/>
-                          </a:solidFill>
-                          <a:latin typeface="맑은 고딕"/>
-                        </a:rPr>
-                        <a:t>3.4 ProductLab 연계</a:t>
+                            <a:srgbClr val="0F2942"/>
+                          </a:solidFill>
+                          <a:latin typeface="맑은 고딕"/>
+                        </a:rPr>
+                        <a:t>3.4 PLM-Nexus 연계</a:t>
                       </a:r>
                     </a:p>
                   </a:txBody>
@@ -26443,7 +26443,7 @@
                       <a:r>
                         <a:rPr sz="890" b="0">
                           <a:solidFill>
-                            <a:srgbClr val="1E293B"/>
+                            <a:srgbClr val="0F2942"/>
                           </a:solidFill>
                           <a:latin typeface="맑은 고딕"/>
                         </a:rPr>
@@ -26462,11 +26462,11 @@
                       <a:r>
                         <a:rPr sz="890" b="0">
                           <a:solidFill>
-                            <a:srgbClr val="1E293B"/>
-                          </a:solidFill>
-                          <a:latin typeface="맑은 고딕"/>
-                        </a:rPr>
-                        <a:t>• 2단계 식약처 가이드라인 pgvector(1536d) 하이브리드 검색 연동</a:t>
+                            <a:srgbClr val="0F2942"/>
+                          </a:solidFill>
+                          <a:latin typeface="맑은 고딕"/>
+                        </a:rPr>
+                        <a:t>• 2단계 공정위·표준원 가이드라인 pgvector(1536d) 하이브리드 검색 연동</a:t>
                       </a:r>
                     </a:p>
                     <a:p>
@@ -26481,11 +26481,11 @@
                       <a:r>
                         <a:rPr sz="890" b="0">
                           <a:solidFill>
-                            <a:srgbClr val="1E293B"/>
-                          </a:solidFill>
-                          <a:latin typeface="맑은 고딕"/>
-                        </a:rPr>
-                        <a:t>• ProductLab 원료·효능·시험결과 실증 데이터 API 조회 성공</a:t>
+                            <a:srgbClr val="0F2942"/>
+                          </a:solidFill>
+                          <a:latin typeface="맑은 고딕"/>
+                        </a:rPr>
+                        <a:t>• PLM-Nexus 원소재·성능규격·시험결과 시험검증 데이터 API 조회 성공</a:t>
                       </a:r>
                     </a:p>
                   </a:txBody>
@@ -26531,7 +26531,7 @@
                       <a:r>
                         <a:rPr sz="890" b="0">
                           <a:solidFill>
-                            <a:srgbClr val="1E293B"/>
+                            <a:srgbClr val="0F2942"/>
                           </a:solidFill>
                           <a:latin typeface="맑은 고딕"/>
                         </a:rPr>
@@ -26550,7 +26550,7 @@
                       <a:r>
                         <a:rPr sz="890" b="0">
                           <a:solidFill>
-                            <a:srgbClr val="1E293B"/>
+                            <a:srgbClr val="0F2942"/>
                           </a:solidFill>
                           <a:latin typeface="맑은 고딕"/>
                         </a:rPr>
@@ -26569,7 +26569,7 @@
                       <a:r>
                         <a:rPr sz="890" b="0">
                           <a:solidFill>
-                            <a:srgbClr val="1E293B"/>
+                            <a:srgbClr val="0F2942"/>
                           </a:solidFill>
                           <a:latin typeface="맑은 고딕"/>
                         </a:rPr>
@@ -26619,7 +26619,7 @@
                       <a:r>
                         <a:rPr sz="890" b="0">
                           <a:solidFill>
-                            <a:srgbClr val="1E293B"/>
+                            <a:srgbClr val="0F2942"/>
                           </a:solidFill>
                           <a:latin typeface="맑은 고딕"/>
                         </a:rPr>
@@ -26638,11 +26638,11 @@
                       <a:r>
                         <a:rPr sz="890" b="0">
                           <a:solidFill>
-                            <a:srgbClr val="1E293B"/>
-                          </a:solidFill>
-                          <a:latin typeface="맑은 고딕"/>
-                        </a:rPr>
-                        <a:t>실증 쿼리 인덱스 최적화</a:t>
+                            <a:srgbClr val="0F2942"/>
+                          </a:solidFill>
+                          <a:latin typeface="맑은 고딕"/>
+                        </a:rPr>
+                        <a:t>시험검증 쿼리 인덱스 최적화</a:t>
                       </a:r>
                     </a:p>
                   </a:txBody>
@@ -26690,7 +26690,7 @@
                       <a:r>
                         <a:rPr sz="890" b="1">
                           <a:solidFill>
-                            <a:srgbClr val="1E293B"/>
+                            <a:srgbClr val="0F2942"/>
                           </a:solidFill>
                           <a:latin typeface="맑은 고딕"/>
                         </a:rPr>
@@ -26709,7 +26709,7 @@
                       <a:r>
                         <a:rPr sz="890" b="1">
                           <a:solidFill>
-                            <a:srgbClr val="1E293B"/>
+                            <a:srgbClr val="0F2942"/>
                           </a:solidFill>
                           <a:latin typeface="맑은 고딕"/>
                         </a:rPr>
@@ -26759,7 +26759,7 @@
                       <a:r>
                         <a:rPr sz="890" b="1">
                           <a:solidFill>
-                            <a:srgbClr val="1E293B"/>
+                            <a:srgbClr val="0F2942"/>
                           </a:solidFill>
                           <a:latin typeface="맑은 고딕"/>
                         </a:rPr>
@@ -26809,7 +26809,7 @@
                       <a:r>
                         <a:rPr sz="890" b="0">
                           <a:solidFill>
-                            <a:srgbClr val="1E293B"/>
+                            <a:srgbClr val="0F2942"/>
                           </a:solidFill>
                           <a:latin typeface="맑은 고딕"/>
                         </a:rPr>
@@ -26828,7 +26828,7 @@
                       <a:r>
                         <a:rPr sz="890" b="0">
                           <a:solidFill>
-                            <a:srgbClr val="1E293B"/>
+                            <a:srgbClr val="0F2942"/>
                           </a:solidFill>
                           <a:latin typeface="맑은 고딕"/>
                         </a:rPr>
@@ -26878,7 +26878,7 @@
                       <a:r>
                         <a:rPr sz="890" b="0">
                           <a:solidFill>
-                            <a:srgbClr val="1E293B"/>
+                            <a:srgbClr val="0F2942"/>
                           </a:solidFill>
                           <a:latin typeface="맑은 고딕"/>
                         </a:rPr>
@@ -26897,7 +26897,7 @@
                       <a:r>
                         <a:rPr sz="890" b="0">
                           <a:solidFill>
-                            <a:srgbClr val="1E293B"/>
+                            <a:srgbClr val="0F2942"/>
                           </a:solidFill>
                           <a:latin typeface="맑은 고딕"/>
                         </a:rPr>
@@ -26916,7 +26916,7 @@
                       <a:r>
                         <a:rPr sz="890" b="0">
                           <a:solidFill>
-                            <a:srgbClr val="1E293B"/>
+                            <a:srgbClr val="0F2942"/>
                           </a:solidFill>
                           <a:latin typeface="맑은 고딕"/>
                         </a:rPr>
@@ -26966,7 +26966,7 @@
                       <a:r>
                         <a:rPr sz="890" b="0">
                           <a:solidFill>
-                            <a:srgbClr val="1E293B"/>
+                            <a:srgbClr val="0F2942"/>
                           </a:solidFill>
                           <a:latin typeface="맑은 고딕"/>
                         </a:rPr>
@@ -26985,7 +26985,7 @@
                       <a:r>
                         <a:rPr sz="890" b="0">
                           <a:solidFill>
-                            <a:srgbClr val="1E293B"/>
+                            <a:srgbClr val="0F2942"/>
                           </a:solidFill>
                           <a:latin typeface="맑은 고딕"/>
                         </a:rPr>
@@ -27035,7 +27035,7 @@
                       <a:r>
                         <a:rPr sz="890" b="0">
                           <a:solidFill>
-                            <a:srgbClr val="1E293B"/>
+                            <a:srgbClr val="0F2942"/>
                           </a:solidFill>
                           <a:latin typeface="맑은 고딕"/>
                         </a:rPr>
@@ -27054,7 +27054,7 @@
                       <a:r>
                         <a:rPr sz="890" b="0">
                           <a:solidFill>
-                            <a:srgbClr val="1E293B"/>
+                            <a:srgbClr val="0F2942"/>
                           </a:solidFill>
                           <a:latin typeface="맑은 고딕"/>
                         </a:rPr>
@@ -27106,7 +27106,7 @@
                       <a:r>
                         <a:rPr sz="890" b="1">
                           <a:solidFill>
-                            <a:srgbClr val="1E293B"/>
+                            <a:srgbClr val="0F2942"/>
                           </a:solidFill>
                           <a:latin typeface="맑은 고딕"/>
                         </a:rPr>
@@ -27125,7 +27125,7 @@
                       <a:r>
                         <a:rPr sz="890" b="1">
                           <a:solidFill>
-                            <a:srgbClr val="1E293B"/>
+                            <a:srgbClr val="0F2942"/>
                           </a:solidFill>
                           <a:latin typeface="맑은 고딕"/>
                         </a:rPr>
@@ -27175,7 +27175,7 @@
                       <a:r>
                         <a:rPr sz="890" b="1">
                           <a:solidFill>
-                            <a:srgbClr val="1E293B"/>
+                            <a:srgbClr val="0F2942"/>
                           </a:solidFill>
                           <a:latin typeface="맑은 고딕"/>
                         </a:rPr>
@@ -27225,7 +27225,7 @@
                       <a:r>
                         <a:rPr sz="890" b="0">
                           <a:solidFill>
-                            <a:srgbClr val="1E293B"/>
+                            <a:srgbClr val="0F2942"/>
                           </a:solidFill>
                           <a:latin typeface="맑은 고딕"/>
                         </a:rPr>
@@ -27244,7 +27244,7 @@
                       <a:r>
                         <a:rPr sz="890" b="0">
                           <a:solidFill>
-                            <a:srgbClr val="1E293B"/>
+                            <a:srgbClr val="0F2942"/>
                           </a:solidFill>
                           <a:latin typeface="맑은 고딕"/>
                         </a:rPr>
@@ -27294,7 +27294,7 @@
                       <a:r>
                         <a:rPr sz="890" b="0">
                           <a:solidFill>
-                            <a:srgbClr val="1E293B"/>
+                            <a:srgbClr val="0F2942"/>
                           </a:solidFill>
                           <a:latin typeface="맑은 고딕"/>
                         </a:rPr>
@@ -27313,11 +27313,11 @@
                       <a:r>
                         <a:rPr sz="890" b="0">
                           <a:solidFill>
-                            <a:srgbClr val="1E293B"/>
-                          </a:solidFill>
-                          <a:latin typeface="맑은 고딕"/>
-                        </a:rPr>
-                        <a:t>• [AI 핵심 KPI] RA 전문 인력 판정 일치율(Accuracy) 90% 이상</a:t>
+                            <a:srgbClr val="0F2942"/>
+                          </a:solidFill>
+                          <a:latin typeface="맑은 고딕"/>
+                        </a:rPr>
+                        <a:t>• [AI 핵심 KPI] QA 전문 인력 판정 일치율(Accuracy) 90% 이상</a:t>
                       </a:r>
                     </a:p>
                     <a:p>
@@ -27332,7 +27332,7 @@
                       <a:r>
                         <a:rPr sz="890" b="0">
                           <a:solidFill>
-                            <a:srgbClr val="1E293B"/>
+                            <a:srgbClr val="0F2942"/>
                           </a:solidFill>
                           <a:latin typeface="맑은 고딕"/>
                         </a:rPr>
@@ -27382,11 +27382,11 @@
                       <a:r>
                         <a:rPr sz="890" b="0">
                           <a:solidFill>
-                            <a:srgbClr val="1E293B"/>
-                          </a:solidFill>
-                          <a:latin typeface="맑은 고딕"/>
-                        </a:rPr>
-                        <a:t>RA Lab 골든셋 실증 평가</a:t>
+                            <a:srgbClr val="0F2942"/>
+                          </a:solidFill>
+                          <a:latin typeface="맑은 고딕"/>
+                        </a:rPr>
+                        <a:t>품질법무검증팀 골든셋 시험검증 평가</a:t>
                       </a:r>
                     </a:p>
                     <a:p>
@@ -27401,7 +27401,7 @@
                       <a:r>
                         <a:rPr sz="890" b="0">
                           <a:solidFill>
-                            <a:srgbClr val="1E293B"/>
+                            <a:srgbClr val="0F2942"/>
                           </a:solidFill>
                           <a:latin typeface="맑은 고딕"/>
                         </a:rPr>
@@ -27420,7 +27420,7 @@
                       <a:r>
                         <a:rPr sz="890" b="0">
                           <a:solidFill>
-                            <a:srgbClr val="1E293B"/>
+                            <a:srgbClr val="0F2942"/>
                           </a:solidFill>
                           <a:latin typeface="맑은 고딕"/>
                         </a:rPr>
@@ -27470,7 +27470,7 @@
                       <a:r>
                         <a:rPr sz="890" b="0">
                           <a:solidFill>
-                            <a:srgbClr val="1E293B"/>
+                            <a:srgbClr val="0F2942"/>
                           </a:solidFill>
                           <a:latin typeface="맑은 고딕"/>
                         </a:rPr>
@@ -27489,7 +27489,7 @@
                       <a:r>
                         <a:rPr sz="890" b="0">
                           <a:solidFill>
-                            <a:srgbClr val="1E293B"/>
+                            <a:srgbClr val="0F2942"/>
                           </a:solidFill>
                           <a:latin typeface="맑은 고딕"/>
                         </a:rPr>
@@ -27541,7 +27541,7 @@
                       <a:r>
                         <a:rPr sz="890" b="1">
                           <a:solidFill>
-                            <a:srgbClr val="1E293B"/>
+                            <a:srgbClr val="0F2942"/>
                           </a:solidFill>
                           <a:latin typeface="맑은 고딕"/>
                         </a:rPr>
@@ -27560,7 +27560,7 @@
                       <a:r>
                         <a:rPr sz="890" b="1">
                           <a:solidFill>
-                            <a:srgbClr val="1E293B"/>
+                            <a:srgbClr val="0F2942"/>
                           </a:solidFill>
                           <a:latin typeface="맑은 고딕"/>
                         </a:rPr>
@@ -27610,7 +27610,7 @@
                       <a:r>
                         <a:rPr sz="890" b="1">
                           <a:solidFill>
-                            <a:srgbClr val="1E293B"/>
+                            <a:srgbClr val="0F2942"/>
                           </a:solidFill>
                           <a:latin typeface="맑은 고딕"/>
                         </a:rPr>
@@ -27660,7 +27660,7 @@
                       <a:r>
                         <a:rPr sz="890" b="0">
                           <a:solidFill>
-                            <a:srgbClr val="1E293B"/>
+                            <a:srgbClr val="0F2942"/>
                           </a:solidFill>
                           <a:latin typeface="맑은 고딕"/>
                         </a:rPr>
@@ -27679,7 +27679,7 @@
                       <a:r>
                         <a:rPr sz="890" b="0">
                           <a:solidFill>
-                            <a:srgbClr val="1E293B"/>
+                            <a:srgbClr val="0F2942"/>
                           </a:solidFill>
                           <a:latin typeface="맑은 고딕"/>
                         </a:rPr>
@@ -27729,7 +27729,7 @@
                       <a:r>
                         <a:rPr sz="890" b="0">
                           <a:solidFill>
-                            <a:srgbClr val="1E293B"/>
+                            <a:srgbClr val="0F2942"/>
                           </a:solidFill>
                           <a:latin typeface="맑은 고딕"/>
                         </a:rPr>
@@ -27748,7 +27748,7 @@
                       <a:r>
                         <a:rPr sz="890" b="0">
                           <a:solidFill>
-                            <a:srgbClr val="1E293B"/>
+                            <a:srgbClr val="0F2942"/>
                           </a:solidFill>
                           <a:latin typeface="맑은 고딕"/>
                         </a:rPr>
@@ -27798,7 +27798,7 @@
                       <a:r>
                         <a:rPr sz="890" b="0">
                           <a:solidFill>
-                            <a:srgbClr val="1E293B"/>
+                            <a:srgbClr val="0F2942"/>
                           </a:solidFill>
                           <a:latin typeface="맑은 고딕"/>
                         </a:rPr>
@@ -27817,7 +27817,7 @@
                       <a:r>
                         <a:rPr sz="890" b="0">
                           <a:solidFill>
-                            <a:srgbClr val="1E293B"/>
+                            <a:srgbClr val="0F2942"/>
                           </a:solidFill>
                           <a:latin typeface="맑은 고딕"/>
                         </a:rPr>
@@ -27867,7 +27867,7 @@
                       <a:r>
                         <a:rPr sz="890" b="0">
                           <a:solidFill>
-                            <a:srgbClr val="1E293B"/>
+                            <a:srgbClr val="0F2942"/>
                           </a:solidFill>
                           <a:latin typeface="맑은 고딕"/>
                         </a:rPr>
@@ -27886,7 +27886,7 @@
                       <a:r>
                         <a:rPr sz="890" b="0">
                           <a:solidFill>
-                            <a:srgbClr val="1E293B"/>
+                            <a:srgbClr val="0F2942"/>
                           </a:solidFill>
                           <a:latin typeface="맑은 고딕"/>
                         </a:rPr>
@@ -28234,7 +28234,7 @@
                 </a:solidFill>
                 <a:latin typeface="맑은 고딕"/>
               </a:rPr>
-              <a:t>한빛글로벌 SyncGuard AI 시스템 구축  |  진도 관리 계획서</a:t>
+              <a:t>한빛글로벌 SyncFlow AI 시스템 구축  |  진도 관리 계획서</a:t>
             </a:r>
           </a:p>
         </p:txBody>
@@ -28538,7 +28538,7 @@
             <a:r>
               <a:rPr sz="900" b="0">
                 <a:solidFill>
-                  <a:srgbClr val="1E293B"/>
+                  <a:srgbClr val="0F2942"/>
                 </a:solidFill>
                 <a:latin typeface="맑은 고딕"/>
               </a:rPr>
@@ -28557,7 +28557,7 @@
             <a:r>
               <a:rPr sz="900" b="0">
                 <a:solidFill>
-                  <a:srgbClr val="1E293B"/>
+                  <a:srgbClr val="0F2942"/>
                 </a:solidFill>
                 <a:latin typeface="맑은 고딕"/>
               </a:rPr>
@@ -28781,7 +28781,7 @@
             <a:r>
               <a:rPr sz="900" b="0">
                 <a:solidFill>
-                  <a:srgbClr val="1E293B"/>
+                  <a:srgbClr val="0F2942"/>
                 </a:solidFill>
                 <a:latin typeface="맑은 고딕"/>
               </a:rPr>
@@ -28800,7 +28800,7 @@
             <a:r>
               <a:rPr sz="900" b="0">
                 <a:solidFill>
-                  <a:srgbClr val="1E293B"/>
+                  <a:srgbClr val="0F2942"/>
                 </a:solidFill>
                 <a:latin typeface="맑은 고딕"/>
               </a:rPr>
@@ -29024,7 +29024,7 @@
             <a:r>
               <a:rPr sz="900" b="0">
                 <a:solidFill>
-                  <a:srgbClr val="1E293B"/>
+                  <a:srgbClr val="0F2942"/>
                 </a:solidFill>
                 <a:latin typeface="맑은 고딕"/>
               </a:rPr>
@@ -29043,7 +29043,7 @@
             <a:r>
               <a:rPr sz="900" b="0">
                 <a:solidFill>
-                  <a:srgbClr val="1E293B"/>
+                  <a:srgbClr val="0F2942"/>
                 </a:solidFill>
                 <a:latin typeface="맑은 고딕"/>
               </a:rPr>
@@ -29267,7 +29267,7 @@
             <a:r>
               <a:rPr sz="900" b="0">
                 <a:solidFill>
-                  <a:srgbClr val="1E293B"/>
+                  <a:srgbClr val="0F2942"/>
                 </a:solidFill>
                 <a:latin typeface="맑은 고딕"/>
               </a:rPr>
@@ -29286,7 +29286,7 @@
             <a:r>
               <a:rPr sz="900" b="0">
                 <a:solidFill>
-                  <a:srgbClr val="1E293B"/>
+                  <a:srgbClr val="0F2942"/>
                 </a:solidFill>
                 <a:latin typeface="맑은 고딕"/>
               </a:rPr>
@@ -29538,7 +29538,7 @@
                       <a:r>
                         <a:rPr sz="919" b="1">
                           <a:solidFill>
-                            <a:srgbClr val="1E293B"/>
+                            <a:srgbClr val="0F2942"/>
                           </a:solidFill>
                           <a:latin typeface="맑은 고딕"/>
                         </a:rPr>
@@ -29557,7 +29557,7 @@
                       <a:r>
                         <a:rPr sz="919" b="1">
                           <a:solidFill>
-                            <a:srgbClr val="1E293B"/>
+                            <a:srgbClr val="0F2942"/>
                           </a:solidFill>
                           <a:latin typeface="맑은 고딕"/>
                         </a:rPr>
@@ -29607,7 +29607,7 @@
                       <a:r>
                         <a:rPr sz="919" b="0">
                           <a:solidFill>
-                            <a:srgbClr val="1E293B"/>
+                            <a:srgbClr val="0F2942"/>
                           </a:solidFill>
                           <a:latin typeface="맑은 고딕"/>
                         </a:rPr>
@@ -29657,7 +29657,7 @@
                       <a:r>
                         <a:rPr sz="919" b="0">
                           <a:solidFill>
-                            <a:srgbClr val="1E293B"/>
+                            <a:srgbClr val="0F2942"/>
                           </a:solidFill>
                           <a:latin typeface="맑은 고딕"/>
                         </a:rPr>
@@ -29676,7 +29676,7 @@
                       <a:r>
                         <a:rPr sz="919" b="0">
                           <a:solidFill>
-                            <a:srgbClr val="1E293B"/>
+                            <a:srgbClr val="0F2942"/>
                           </a:solidFill>
                           <a:latin typeface="맑은 고딕"/>
                         </a:rPr>
@@ -29726,7 +29726,7 @@
                       <a:r>
                         <a:rPr sz="919" b="0">
                           <a:solidFill>
-                            <a:srgbClr val="1E293B"/>
+                            <a:srgbClr val="0F2942"/>
                           </a:solidFill>
                           <a:latin typeface="맑은 고딕"/>
                         </a:rPr>
@@ -29745,7 +29745,7 @@
                       <a:r>
                         <a:rPr sz="919" b="0">
                           <a:solidFill>
-                            <a:srgbClr val="1E293B"/>
+                            <a:srgbClr val="0F2942"/>
                           </a:solidFill>
                           <a:latin typeface="맑은 고딕"/>
                         </a:rPr>
@@ -29797,7 +29797,7 @@
                       <a:r>
                         <a:rPr sz="919" b="1">
                           <a:solidFill>
-                            <a:srgbClr val="1E293B"/>
+                            <a:srgbClr val="0F2942"/>
                           </a:solidFill>
                           <a:latin typeface="맑은 고딕"/>
                         </a:rPr>
@@ -29816,7 +29816,7 @@
                       <a:r>
                         <a:rPr sz="919" b="1">
                           <a:solidFill>
-                            <a:srgbClr val="1E293B"/>
+                            <a:srgbClr val="0F2942"/>
                           </a:solidFill>
                           <a:latin typeface="맑은 고딕"/>
                         </a:rPr>
@@ -29866,11 +29866,11 @@
                       <a:r>
                         <a:rPr sz="919" b="0">
                           <a:solidFill>
-                            <a:srgbClr val="1E293B"/>
-                          </a:solidFill>
-                          <a:latin typeface="맑은 고딕"/>
-                        </a:rPr>
-                        <a:t>• 외부 인터페이스(SSO/MarketingHub/ProductLab) 지연, 정책 변경 등으로 마일스톤 일자 변경 필요 시</a:t>
+                            <a:srgbClr val="0F2942"/>
+                          </a:solidFill>
+                          <a:latin typeface="맑은 고딕"/>
+                        </a:rPr>
+                        <a:t>• 외부 인터페이스(SSO/SRM-Portal/PLM-Nexus) 지연, 정책 변경 등으로 마일스톤 일자 변경 필요 시</a:t>
                       </a:r>
                     </a:p>
                   </a:txBody>
@@ -29916,7 +29916,7 @@
                       <a:r>
                         <a:rPr sz="919" b="0">
                           <a:solidFill>
-                            <a:srgbClr val="1E293B"/>
+                            <a:srgbClr val="0F2942"/>
                           </a:solidFill>
                           <a:latin typeface="맑은 고딕"/>
                         </a:rPr>
@@ -29935,7 +29935,7 @@
                       <a:r>
                         <a:rPr sz="919" b="0">
                           <a:solidFill>
-                            <a:srgbClr val="1E293B"/>
+                            <a:srgbClr val="0F2942"/>
                           </a:solidFill>
                           <a:latin typeface="맑은 고딕"/>
                         </a:rPr>
@@ -29985,7 +29985,7 @@
                       <a:r>
                         <a:rPr sz="919" b="0">
                           <a:solidFill>
-                            <a:srgbClr val="1E293B"/>
+                            <a:srgbClr val="0F2942"/>
                           </a:solidFill>
                           <a:latin typeface="맑은 고딕"/>
                         </a:rPr>
@@ -30004,7 +30004,7 @@
                       <a:r>
                         <a:rPr sz="919" b="0">
                           <a:solidFill>
-                            <a:srgbClr val="1E293B"/>
+                            <a:srgbClr val="0F2942"/>
                           </a:solidFill>
                           <a:latin typeface="맑은 고딕"/>
                         </a:rPr>
@@ -30056,7 +30056,7 @@
                       <a:r>
                         <a:rPr sz="919" b="1">
                           <a:solidFill>
-                            <a:srgbClr val="1E293B"/>
+                            <a:srgbClr val="0F2942"/>
                           </a:solidFill>
                           <a:latin typeface="맑은 고딕"/>
                         </a:rPr>
@@ -30075,7 +30075,7 @@
                       <a:r>
                         <a:rPr sz="919" b="1">
                           <a:solidFill>
-                            <a:srgbClr val="1E293B"/>
+                            <a:srgbClr val="0F2942"/>
                           </a:solidFill>
                           <a:latin typeface="맑은 고딕"/>
                         </a:rPr>
@@ -30125,7 +30125,7 @@
                       <a:r>
                         <a:rPr sz="919" b="0">
                           <a:solidFill>
-                            <a:srgbClr val="1E293B"/>
+                            <a:srgbClr val="0F2942"/>
                           </a:solidFill>
                           <a:latin typeface="맑은 고딕"/>
                         </a:rPr>
@@ -30175,7 +30175,7 @@
                       <a:r>
                         <a:rPr sz="919" b="0">
                           <a:solidFill>
-                            <a:srgbClr val="1E293B"/>
+                            <a:srgbClr val="0F2942"/>
                           </a:solidFill>
                           <a:latin typeface="맑은 고딕"/>
                         </a:rPr>
@@ -30194,7 +30194,7 @@
                       <a:r>
                         <a:rPr sz="919" b="0">
                           <a:solidFill>
-                            <a:srgbClr val="1E293B"/>
+                            <a:srgbClr val="0F2942"/>
                           </a:solidFill>
                           <a:latin typeface="맑은 고딕"/>
                         </a:rPr>
@@ -30244,7 +30244,7 @@
                       <a:r>
                         <a:rPr sz="919" b="0">
                           <a:solidFill>
-                            <a:srgbClr val="1E293B"/>
+                            <a:srgbClr val="0F2942"/>
                           </a:solidFill>
                           <a:latin typeface="맑은 고딕"/>
                         </a:rPr>
@@ -30263,7 +30263,7 @@
                       <a:r>
                         <a:rPr sz="919" b="0">
                           <a:solidFill>
-                            <a:srgbClr val="1E293B"/>
+                            <a:srgbClr val="0F2942"/>
                           </a:solidFill>
                           <a:latin typeface="맑은 고딕"/>
                         </a:rPr>
